--- a/deck/flex-pitch-uz.pptx
+++ b/deck/flex-pitch-uz.pptx
@@ -20,6 +20,7 @@
     <p:sldId id="268" r:id="rId19"/>
     <p:sldId id="269" r:id="rId20"/>
     <p:sldId id="270" r:id="rId21"/>
+    <p:sldId id="271" r:id="rId22"/>
   </p:sldIdLst>
   <p:sldSz cx="12191695" cy="6858000" type="screen4x3"/>
   <p:notesSz cx="6858000" cy="9144000"/>
@@ -3357,6 +3358,48 @@
       <p:pic>
         <p:nvPicPr>
           <p:cNvPr id="2" name="Picture 1" descr="15.jpg"/>
+          <p:cNvPicPr>
+            <a:picLocks noChangeAspect="1"/>
+          </p:cNvPicPr>
+          <p:nvPr/>
+        </p:nvPicPr>
+        <p:blipFill>
+          <a:blip r:embed="rId2"/>
+          <a:stretch>
+            <a:fillRect/>
+          </a:stretch>
+        </p:blipFill>
+        <p:spPr>
+          <a:xfrm>
+            <a:off x="0" y="0"/>
+            <a:ext cx="12191695" cy="6858000"/>
+          </a:xfrm>
+          <a:prstGeom prst="rect">
+            <a:avLst/>
+          </a:prstGeom>
+        </p:spPr>
+      </p:pic>
+    </p:spTree>
+  </p:cSld>
+  <p:clrMapOvr>
+    <a:masterClrMapping/>
+  </p:clrMapOvr>
+</p:sld>
+</file>
+
+<file path=ppt/slides/slide16.xml><?xml version="1.0" encoding="utf-8"?>
+<p:sld xmlns:a="http://schemas.openxmlformats.org/drawingml/2006/main" xmlns:p="http://schemas.openxmlformats.org/presentationml/2006/main" xmlns:r="http://schemas.openxmlformats.org/officeDocument/2006/relationships">
+  <p:cSld>
+    <p:spTree>
+      <p:nvGrpSpPr>
+        <p:cNvPr id="1" name=""/>
+        <p:cNvGrpSpPr/>
+        <p:nvPr/>
+      </p:nvGrpSpPr>
+      <p:grpSpPr/>
+      <p:pic>
+        <p:nvPicPr>
+          <p:cNvPr id="2" name="Picture 1" descr="16.jpg"/>
           <p:cNvPicPr>
             <a:picLocks noChangeAspect="1"/>
           </p:cNvPicPr>

--- a/deck/flex-pitch-uz.pptx
+++ b/deck/flex-pitch-uz.pptx
@@ -19143,11 +19143,11 @@
         <p:spPr>
           <a:xfrm>
             <a:off x="812800" y="2184400"/>
-            <a:ext cx="3378200" cy="2006600"/>
+            <a:ext cx="2527300" cy="1993900"/>
           </a:xfrm>
           <a:prstGeom prst="roundRect">
             <a:avLst>
-              <a:gd name="adj" fmla="val 8860"/>
+              <a:gd name="adj" fmla="val 8917"/>
             </a:avLst>
           </a:prstGeom>
           <a:solidFill>
@@ -19198,7 +19198,7 @@
         </p:blipFill>
         <p:spPr>
           <a:xfrm>
-            <a:off x="1485900" y="2260600"/>
+            <a:off x="1060450" y="2260600"/>
             <a:ext cx="2032000" cy="1016000"/>
           </a:xfrm>
           <a:prstGeom prst="rect">
@@ -19214,8 +19214,8 @@
         </p:nvSpPr>
         <p:spPr>
           <a:xfrm>
-            <a:off x="1016000" y="3403600"/>
-            <a:ext cx="2997200" cy="335280"/>
+            <a:off x="990600" y="3390900"/>
+            <a:ext cx="2197100" cy="307340"/>
           </a:xfrm>
           <a:prstGeom prst="rect">
             <a:avLst/>
@@ -19237,7 +19237,7 @@
               </a:spcAft>
             </a:pPr>
             <a:r>
-              <a:rPr sz="1200" b="1">
+              <a:rPr sz="1100" b="1">
                 <a:solidFill>
                   <a:srgbClr val="0E0A1B"/>
                 </a:solidFill>
@@ -19256,8 +19256,8 @@
         </p:nvSpPr>
         <p:spPr>
           <a:xfrm>
-            <a:off x="1016000" y="3632200"/>
-            <a:ext cx="2997200" cy="245872"/>
+            <a:off x="990600" y="3606800"/>
+            <a:ext cx="2197100" cy="223520"/>
           </a:xfrm>
           <a:prstGeom prst="rect">
             <a:avLst/>
@@ -19279,7 +19279,7 @@
               </a:spcAft>
             </a:pPr>
             <a:r>
-              <a:rPr sz="880" b="0">
+              <a:rPr sz="800" b="0">
                 <a:solidFill>
                   <a:srgbClr val="5A5566"/>
                 </a:solidFill>
@@ -19298,8 +19298,8 @@
         </p:nvSpPr>
         <p:spPr>
           <a:xfrm>
-            <a:off x="1016000" y="3860800"/>
-            <a:ext cx="2997200" cy="293370"/>
+            <a:off x="990600" y="3873500"/>
+            <a:ext cx="2197100" cy="268224"/>
           </a:xfrm>
           <a:prstGeom prst="rect">
             <a:avLst/>
@@ -19321,7 +19321,7 @@
               </a:spcAft>
             </a:pPr>
             <a:r>
-              <a:rPr sz="1050" b="1">
+              <a:rPr sz="960" b="1">
                 <a:solidFill>
                   <a:srgbClr val="4D7C0F"/>
                 </a:solidFill>
@@ -19340,12 +19340,12 @@
         </p:nvSpPr>
         <p:spPr>
           <a:xfrm>
-            <a:off x="4368800" y="2184400"/>
-            <a:ext cx="3378200" cy="2006600"/>
+            <a:off x="3492500" y="2184400"/>
+            <a:ext cx="2527300" cy="1993900"/>
           </a:xfrm>
           <a:prstGeom prst="roundRect">
             <a:avLst>
-              <a:gd name="adj" fmla="val 8860"/>
+              <a:gd name="adj" fmla="val 8917"/>
             </a:avLst>
           </a:prstGeom>
           <a:solidFill>
@@ -19396,7 +19396,7 @@
         </p:blipFill>
         <p:spPr>
           <a:xfrm>
-            <a:off x="5041900" y="2260600"/>
+            <a:off x="3740150" y="2260600"/>
             <a:ext cx="2032000" cy="1016000"/>
           </a:xfrm>
           <a:prstGeom prst="rect">
@@ -19412,8 +19412,8 @@
         </p:nvSpPr>
         <p:spPr>
           <a:xfrm>
-            <a:off x="4572000" y="3403600"/>
-            <a:ext cx="2997200" cy="335280"/>
+            <a:off x="3670300" y="3390900"/>
+            <a:ext cx="2197100" cy="307340"/>
           </a:xfrm>
           <a:prstGeom prst="rect">
             <a:avLst/>
@@ -19435,7 +19435,7 @@
               </a:spcAft>
             </a:pPr>
             <a:r>
-              <a:rPr sz="1200" b="1">
+              <a:rPr sz="1100" b="1">
                 <a:solidFill>
                   <a:srgbClr val="0E0A1B"/>
                 </a:solidFill>
@@ -19454,8 +19454,8 @@
         </p:nvSpPr>
         <p:spPr>
           <a:xfrm>
-            <a:off x="4572000" y="3632200"/>
-            <a:ext cx="2997200" cy="245872"/>
+            <a:off x="3670300" y="3606800"/>
+            <a:ext cx="2197100" cy="223520"/>
           </a:xfrm>
           <a:prstGeom prst="rect">
             <a:avLst/>
@@ -19477,7 +19477,7 @@
               </a:spcAft>
             </a:pPr>
             <a:r>
-              <a:rPr sz="880" b="0">
+              <a:rPr sz="800" b="0">
                 <a:solidFill>
                   <a:srgbClr val="5A5566"/>
                 </a:solidFill>
@@ -19496,8 +19496,8 @@
         </p:nvSpPr>
         <p:spPr>
           <a:xfrm>
-            <a:off x="4572000" y="3860800"/>
-            <a:ext cx="2997200" cy="293370"/>
+            <a:off x="3670300" y="3873500"/>
+            <a:ext cx="2197100" cy="268224"/>
           </a:xfrm>
           <a:prstGeom prst="rect">
             <a:avLst/>
@@ -19519,7 +19519,7 @@
               </a:spcAft>
             </a:pPr>
             <a:r>
-              <a:rPr sz="1050" b="1">
+              <a:rPr sz="960" b="1">
                 <a:solidFill>
                   <a:srgbClr val="4D7C0F"/>
                 </a:solidFill>
@@ -19538,12 +19538,12 @@
         </p:nvSpPr>
         <p:spPr>
           <a:xfrm>
-            <a:off x="7924800" y="2184400"/>
-            <a:ext cx="3378200" cy="2006600"/>
+            <a:off x="6172200" y="2184400"/>
+            <a:ext cx="2527300" cy="1993900"/>
           </a:xfrm>
           <a:prstGeom prst="roundRect">
             <a:avLst>
-              <a:gd name="adj" fmla="val 8860"/>
+              <a:gd name="adj" fmla="val 8917"/>
             </a:avLst>
           </a:prstGeom>
           <a:solidFill>
@@ -19594,7 +19594,7 @@
         </p:blipFill>
         <p:spPr>
           <a:xfrm>
-            <a:off x="8597900" y="2260600"/>
+            <a:off x="6419850" y="2260600"/>
             <a:ext cx="2032000" cy="1016000"/>
           </a:xfrm>
           <a:prstGeom prst="rect">
@@ -19610,8 +19610,8 @@
         </p:nvSpPr>
         <p:spPr>
           <a:xfrm>
-            <a:off x="8128000" y="3403600"/>
-            <a:ext cx="2997200" cy="335280"/>
+            <a:off x="6350000" y="3390900"/>
+            <a:ext cx="2197100" cy="307340"/>
           </a:xfrm>
           <a:prstGeom prst="rect">
             <a:avLst/>
@@ -19633,7 +19633,7 @@
               </a:spcAft>
             </a:pPr>
             <a:r>
-              <a:rPr sz="1200" b="1">
+              <a:rPr sz="1100" b="1">
                 <a:solidFill>
                   <a:srgbClr val="0E0A1B"/>
                 </a:solidFill>
@@ -19652,8 +19652,8 @@
         </p:nvSpPr>
         <p:spPr>
           <a:xfrm>
-            <a:off x="8128000" y="3632200"/>
-            <a:ext cx="2997200" cy="245872"/>
+            <a:off x="6350000" y="3606800"/>
+            <a:ext cx="2197100" cy="223520"/>
           </a:xfrm>
           <a:prstGeom prst="rect">
             <a:avLst/>
@@ -19675,7 +19675,7 @@
               </a:spcAft>
             </a:pPr>
             <a:r>
-              <a:rPr sz="880" b="0">
+              <a:rPr sz="800" b="0">
                 <a:solidFill>
                   <a:srgbClr val="5A5566"/>
                 </a:solidFill>
@@ -19694,8 +19694,8 @@
         </p:nvSpPr>
         <p:spPr>
           <a:xfrm>
-            <a:off x="8128000" y="3860800"/>
-            <a:ext cx="2997200" cy="293370"/>
+            <a:off x="6350000" y="3873500"/>
+            <a:ext cx="2197100" cy="268224"/>
           </a:xfrm>
           <a:prstGeom prst="rect">
             <a:avLst/>
@@ -19717,7 +19717,7 @@
               </a:spcAft>
             </a:pPr>
             <a:r>
-              <a:rPr sz="1050" b="1">
+              <a:rPr sz="960" b="1">
                 <a:solidFill>
                   <a:srgbClr val="4D7C0F"/>
                 </a:solidFill>
@@ -19736,12 +19736,12 @@
         </p:nvSpPr>
         <p:spPr>
           <a:xfrm>
-            <a:off x="812800" y="4368800"/>
-            <a:ext cx="3378200" cy="2006600"/>
+            <a:off x="8851900" y="2184400"/>
+            <a:ext cx="2527300" cy="1993900"/>
           </a:xfrm>
           <a:prstGeom prst="roundRect">
             <a:avLst>
-              <a:gd name="adj" fmla="val 8860"/>
+              <a:gd name="adj" fmla="val 8917"/>
             </a:avLst>
           </a:prstGeom>
           <a:solidFill>
@@ -19786,15 +19786,15 @@
         </p:nvPicPr>
         <p:blipFill>
           <a:blip r:embed="rId5"/>
-          <a:srcRect t="24400" b="24400"/>
+          <a:srcRect t="15027" b="15027"/>
           <a:stretch>
             <a:fillRect/>
           </a:stretch>
         </p:blipFill>
         <p:spPr>
           <a:xfrm>
-            <a:off x="914400" y="4470400"/>
-            <a:ext cx="3175000" cy="914400"/>
+            <a:off x="8953500" y="2286000"/>
+            <a:ext cx="2324100" cy="914400"/>
           </a:xfrm>
           <a:prstGeom prst="rect">
             <a:avLst/>
@@ -19809,8 +19809,8 @@
         </p:nvSpPr>
         <p:spPr>
           <a:xfrm>
-            <a:off x="1016000" y="5588000"/>
-            <a:ext cx="2997200" cy="335280"/>
+            <a:off x="9029700" y="3390900"/>
+            <a:ext cx="2197100" cy="307340"/>
           </a:xfrm>
           <a:prstGeom prst="rect">
             <a:avLst/>
@@ -19832,7 +19832,7 @@
               </a:spcAft>
             </a:pPr>
             <a:r>
-              <a:rPr sz="1200" b="1">
+              <a:rPr sz="1100" b="1">
                 <a:solidFill>
                   <a:srgbClr val="0E0A1B"/>
                 </a:solidFill>
@@ -19851,8 +19851,8 @@
         </p:nvSpPr>
         <p:spPr>
           <a:xfrm>
-            <a:off x="1016000" y="5816600"/>
-            <a:ext cx="2997200" cy="245872"/>
+            <a:off x="9029700" y="3606800"/>
+            <a:ext cx="2197100" cy="223520"/>
           </a:xfrm>
           <a:prstGeom prst="rect">
             <a:avLst/>
@@ -19874,7 +19874,7 @@
               </a:spcAft>
             </a:pPr>
             <a:r>
-              <a:rPr sz="880" b="0">
+              <a:rPr sz="800" b="0">
                 <a:solidFill>
                   <a:srgbClr val="5A5566"/>
                 </a:solidFill>
@@ -19893,8 +19893,8 @@
         </p:nvSpPr>
         <p:spPr>
           <a:xfrm>
-            <a:off x="1016000" y="6045200"/>
-            <a:ext cx="2997200" cy="293370"/>
+            <a:off x="9029700" y="3873500"/>
+            <a:ext cx="2197100" cy="268224"/>
           </a:xfrm>
           <a:prstGeom prst="rect">
             <a:avLst/>
@@ -19916,7 +19916,7 @@
               </a:spcAft>
             </a:pPr>
             <a:r>
-              <a:rPr sz="1050" b="1">
+              <a:rPr sz="960" b="1">
                 <a:solidFill>
                   <a:srgbClr val="4D7C0F"/>
                 </a:solidFill>
@@ -19935,12 +19935,12 @@
         </p:nvSpPr>
         <p:spPr>
           <a:xfrm>
-            <a:off x="4368800" y="4368800"/>
-            <a:ext cx="3378200" cy="2006600"/>
+            <a:off x="812800" y="4330700"/>
+            <a:ext cx="2527300" cy="1993900"/>
           </a:xfrm>
           <a:prstGeom prst="roundRect">
             <a:avLst>
-              <a:gd name="adj" fmla="val 8860"/>
+              <a:gd name="adj" fmla="val 8917"/>
             </a:avLst>
           </a:prstGeom>
           <a:solidFill>
@@ -19977,7 +19977,7 @@
       </p:sp>
       <p:pic>
         <p:nvPicPr>
-          <p:cNvPr id="26" name="Picture 25" descr="stend2.jpg"/>
+          <p:cNvPr id="26" name="Picture 25" descr="hayvon-teg.jpg"/>
           <p:cNvPicPr>
             <a:picLocks noChangeAspect="1"/>
           </p:cNvPicPr>
@@ -19985,15 +19985,15 @@
         </p:nvPicPr>
         <p:blipFill>
           <a:blip r:embed="rId6"/>
-          <a:srcRect t="37172" b="37172"/>
+          <a:srcRect t="47330" b="7705"/>
           <a:stretch>
             <a:fillRect/>
           </a:stretch>
         </p:blipFill>
         <p:spPr>
           <a:xfrm>
-            <a:off x="4470400" y="4470400"/>
-            <a:ext cx="3175000" cy="914400"/>
+            <a:off x="914400" y="4432300"/>
+            <a:ext cx="2324100" cy="914400"/>
           </a:xfrm>
           <a:prstGeom prst="rect">
             <a:avLst/>
@@ -20008,8 +20008,8 @@
         </p:nvSpPr>
         <p:spPr>
           <a:xfrm>
-            <a:off x="4572000" y="5588000"/>
-            <a:ext cx="2997200" cy="335280"/>
+            <a:off x="990600" y="5537200"/>
+            <a:ext cx="2197100" cy="307340"/>
           </a:xfrm>
           <a:prstGeom prst="rect">
             <a:avLst/>
@@ -20031,13 +20031,13 @@
               </a:spcAft>
             </a:pPr>
             <a:r>
-              <a:rPr sz="1200" b="1">
+              <a:rPr sz="1100" b="1">
                 <a:solidFill>
                   <a:srgbClr val="0E0A1B"/>
                 </a:solidFill>
                 <a:latin typeface="Space Grotesk"/>
               </a:rPr>
-              <a:t>Stol qurilmasi</a:t>
+              <a:t>Hayvon tegi</a:t>
             </a:r>
           </a:p>
         </p:txBody>
@@ -20050,8 +20050,8 @@
         </p:nvSpPr>
         <p:spPr>
           <a:xfrm>
-            <a:off x="4572000" y="5816600"/>
-            <a:ext cx="2997200" cy="245872"/>
+            <a:off x="990600" y="5753100"/>
+            <a:ext cx="2197100" cy="223520"/>
           </a:xfrm>
           <a:prstGeom prst="rect">
             <a:avLst/>
@@ -20073,13 +20073,13 @@
               </a:spcAft>
             </a:pPr>
             <a:r>
-              <a:rPr sz="880" b="0">
+              <a:rPr sz="800" b="0">
                 <a:solidFill>
                   <a:srgbClr val="5A5566"/>
                 </a:solidFill>
                 <a:latin typeface="Inter"/>
               </a:rPr>
-              <a:t>Kafe, salon, klinika stoliga</a:t>
+              <a:t>Bo'yinbog'da — topilsa bog'lanadi</a:t>
             </a:r>
           </a:p>
         </p:txBody>
@@ -20092,8 +20092,8 @@
         </p:nvSpPr>
         <p:spPr>
           <a:xfrm>
-            <a:off x="4572000" y="6045200"/>
-            <a:ext cx="2997200" cy="293370"/>
+            <a:off x="990600" y="6019800"/>
+            <a:ext cx="2197100" cy="268224"/>
           </a:xfrm>
           <a:prstGeom prst="rect">
             <a:avLst/>
@@ -20115,13 +20115,13 @@
               </a:spcAft>
             </a:pPr>
             <a:r>
-              <a:rPr sz="1050" b="1">
+              <a:rPr sz="960" b="1">
                 <a:solidFill>
                   <a:srgbClr val="4D7C0F"/>
                 </a:solidFill>
                 <a:latin typeface="Space Grotesk"/>
               </a:rPr>
-              <a:t>Obyekt tarifida</a:t>
+              <a:t>Kelishuv bo'yicha</a:t>
             </a:r>
           </a:p>
         </p:txBody>
@@ -20134,12 +20134,12 @@
         </p:nvSpPr>
         <p:spPr>
           <a:xfrm>
-            <a:off x="7924800" y="4368800"/>
-            <a:ext cx="3378200" cy="2006600"/>
+            <a:off x="3492500" y="4330700"/>
+            <a:ext cx="2527300" cy="1993900"/>
           </a:xfrm>
           <a:prstGeom prst="roundRect">
             <a:avLst>
-              <a:gd name="adj" fmla="val 8860"/>
+              <a:gd name="adj" fmla="val 8917"/>
             </a:avLst>
           </a:prstGeom>
           <a:solidFill>
@@ -20176,7 +20176,7 @@
       </p:sp>
       <p:pic>
         <p:nvPicPr>
-          <p:cNvPr id="31" name="Picture 30" descr="konsyerj.jpg"/>
+          <p:cNvPr id="31" name="Picture 30" descr="buyum-teg.jpg"/>
           <p:cNvPicPr>
             <a:picLocks noChangeAspect="1"/>
           </p:cNvPicPr>
@@ -20184,15 +20184,15 @@
         </p:nvPicPr>
         <p:blipFill>
           <a:blip r:embed="rId7"/>
-          <a:srcRect t="31593" b="31593"/>
+          <a:srcRect t="26993" b="22085"/>
           <a:stretch>
             <a:fillRect/>
           </a:stretch>
         </p:blipFill>
         <p:spPr>
           <a:xfrm>
-            <a:off x="8026400" y="4470400"/>
-            <a:ext cx="3175000" cy="914400"/>
+            <a:off x="3594100" y="4432300"/>
+            <a:ext cx="2324100" cy="914400"/>
           </a:xfrm>
           <a:prstGeom prst="rect">
             <a:avLst/>
@@ -20207,8 +20207,8 @@
         </p:nvSpPr>
         <p:spPr>
           <a:xfrm>
-            <a:off x="8128000" y="5588000"/>
-            <a:ext cx="2997200" cy="335280"/>
+            <a:off x="3670300" y="5537200"/>
+            <a:ext cx="2197100" cy="307340"/>
           </a:xfrm>
           <a:prstGeom prst="rect">
             <a:avLst/>
@@ -20230,12 +20230,410 @@
               </a:spcAft>
             </a:pPr>
             <a:r>
-              <a:rPr sz="1200" b="1">
+              <a:rPr sz="1100" b="1">
                 <a:solidFill>
                   <a:srgbClr val="0E0A1B"/>
                 </a:solidFill>
                 <a:latin typeface="Space Grotesk"/>
               </a:rPr>
+              <a:t>Buyum tegi</a:t>
+            </a:r>
+          </a:p>
+        </p:txBody>
+      </p:sp>
+      <p:sp>
+        <p:nvSpPr>
+          <p:cNvPr id="33" name="TextBox 32"/>
+          <p:cNvSpPr txBox="1"/>
+          <p:nvPr/>
+        </p:nvSpPr>
+        <p:spPr>
+          <a:xfrm>
+            <a:off x="3670300" y="5753100"/>
+            <a:ext cx="2197100" cy="223520"/>
+          </a:xfrm>
+          <a:prstGeom prst="rect">
+            <a:avLst/>
+          </a:prstGeom>
+          <a:noFill/>
+        </p:spPr>
+        <p:txBody>
+          <a:bodyPr wrap="square" anchor="t" lIns="0" rIns="0" tIns="0" bIns="0">
+            <a:spAutoFit/>
+          </a:bodyPr>
+          <a:lstStyle/>
+          <a:p>
+            <a:pPr algn="l">
+              <a:lnSpc>
+                <a:spcPct val="135000"/>
+              </a:lnSpc>
+              <a:spcAft>
+                <a:spcPts val="0"/>
+              </a:spcAft>
+            </a:pPr>
+            <a:r>
+              <a:rPr sz="800" b="0">
+                <a:solidFill>
+                  <a:srgbClr val="5A5566"/>
+                </a:solidFill>
+                <a:latin typeface="Inter"/>
+              </a:rPr>
+              <a:t>Kalit, sumka, chamadonda</a:t>
+            </a:r>
+          </a:p>
+        </p:txBody>
+      </p:sp>
+      <p:sp>
+        <p:nvSpPr>
+          <p:cNvPr id="34" name="TextBox 33"/>
+          <p:cNvSpPr txBox="1"/>
+          <p:nvPr/>
+        </p:nvSpPr>
+        <p:spPr>
+          <a:xfrm>
+            <a:off x="3670300" y="6019800"/>
+            <a:ext cx="2197100" cy="268224"/>
+          </a:xfrm>
+          <a:prstGeom prst="rect">
+            <a:avLst/>
+          </a:prstGeom>
+          <a:noFill/>
+        </p:spPr>
+        <p:txBody>
+          <a:bodyPr wrap="square" anchor="t" lIns="0" rIns="0" tIns="0" bIns="0">
+            <a:spAutoFit/>
+          </a:bodyPr>
+          <a:lstStyle/>
+          <a:p>
+            <a:pPr algn="l">
+              <a:lnSpc>
+                <a:spcPct val="135000"/>
+              </a:lnSpc>
+              <a:spcAft>
+                <a:spcPts val="0"/>
+              </a:spcAft>
+            </a:pPr>
+            <a:r>
+              <a:rPr sz="960" b="1">
+                <a:solidFill>
+                  <a:srgbClr val="4D7C0F"/>
+                </a:solidFill>
+                <a:latin typeface="Space Grotesk"/>
+              </a:rPr>
+              <a:t>Kelishuv bo'yicha</a:t>
+            </a:r>
+          </a:p>
+        </p:txBody>
+      </p:sp>
+      <p:sp>
+        <p:nvSpPr>
+          <p:cNvPr id="35" name="Rounded Rectangle 34"/>
+          <p:cNvSpPr/>
+          <p:nvPr/>
+        </p:nvSpPr>
+        <p:spPr>
+          <a:xfrm>
+            <a:off x="6172200" y="4330700"/>
+            <a:ext cx="2527300" cy="1993900"/>
+          </a:xfrm>
+          <a:prstGeom prst="roundRect">
+            <a:avLst>
+              <a:gd name="adj" fmla="val 8917"/>
+            </a:avLst>
+          </a:prstGeom>
+          <a:solidFill>
+            <a:srgbClr val="FFFFFF"/>
+          </a:solidFill>
+          <a:ln w="9525">
+            <a:solidFill>
+              <a:srgbClr val="E6E4EA"/>
+            </a:solidFill>
+          </a:ln>
+          <a:effectLst/>
+        </p:spPr>
+        <p:style>
+          <a:lnRef idx="1">
+            <a:schemeClr val="accent1"/>
+          </a:lnRef>
+          <a:fillRef idx="3">
+            <a:schemeClr val="accent1"/>
+          </a:fillRef>
+          <a:effectRef idx="2">
+            <a:schemeClr val="accent1"/>
+          </a:effectRef>
+          <a:fontRef idx="minor">
+            <a:schemeClr val="lt1"/>
+          </a:fontRef>
+        </p:style>
+        <p:txBody>
+          <a:bodyPr rtlCol="0" anchor="ctr" wrap="square"/>
+          <a:lstStyle/>
+          <a:p>
+            <a:pPr algn="ctr"/>
+          </a:p>
+        </p:txBody>
+      </p:sp>
+      <p:pic>
+        <p:nvPicPr>
+          <p:cNvPr id="36" name="Picture 35" descr="stend2.jpg"/>
+          <p:cNvPicPr>
+            <a:picLocks noChangeAspect="1"/>
+          </p:cNvPicPr>
+          <p:nvPr/>
+        </p:nvPicPr>
+        <p:blipFill>
+          <a:blip r:embed="rId8"/>
+          <a:srcRect t="32475" b="32475"/>
+          <a:stretch>
+            <a:fillRect/>
+          </a:stretch>
+        </p:blipFill>
+        <p:spPr>
+          <a:xfrm>
+            <a:off x="6273800" y="4432300"/>
+            <a:ext cx="2324100" cy="914400"/>
+          </a:xfrm>
+          <a:prstGeom prst="rect">
+            <a:avLst/>
+          </a:prstGeom>
+        </p:spPr>
+      </p:pic>
+      <p:sp>
+        <p:nvSpPr>
+          <p:cNvPr id="37" name="TextBox 36"/>
+          <p:cNvSpPr txBox="1"/>
+          <p:nvPr/>
+        </p:nvSpPr>
+        <p:spPr>
+          <a:xfrm>
+            <a:off x="6350000" y="5537200"/>
+            <a:ext cx="2197100" cy="307340"/>
+          </a:xfrm>
+          <a:prstGeom prst="rect">
+            <a:avLst/>
+          </a:prstGeom>
+          <a:noFill/>
+        </p:spPr>
+        <p:txBody>
+          <a:bodyPr wrap="square" anchor="t" lIns="0" rIns="0" tIns="0" bIns="0">
+            <a:spAutoFit/>
+          </a:bodyPr>
+          <a:lstStyle/>
+          <a:p>
+            <a:pPr algn="l">
+              <a:lnSpc>
+                <a:spcPct val="135000"/>
+              </a:lnSpc>
+              <a:spcAft>
+                <a:spcPts val="0"/>
+              </a:spcAft>
+            </a:pPr>
+            <a:r>
+              <a:rPr sz="1100" b="1">
+                <a:solidFill>
+                  <a:srgbClr val="0E0A1B"/>
+                </a:solidFill>
+                <a:latin typeface="Space Grotesk"/>
+              </a:rPr>
+              <a:t>Stol qurilmasi</a:t>
+            </a:r>
+          </a:p>
+        </p:txBody>
+      </p:sp>
+      <p:sp>
+        <p:nvSpPr>
+          <p:cNvPr id="38" name="TextBox 37"/>
+          <p:cNvSpPr txBox="1"/>
+          <p:nvPr/>
+        </p:nvSpPr>
+        <p:spPr>
+          <a:xfrm>
+            <a:off x="6350000" y="5753100"/>
+            <a:ext cx="2197100" cy="223520"/>
+          </a:xfrm>
+          <a:prstGeom prst="rect">
+            <a:avLst/>
+          </a:prstGeom>
+          <a:noFill/>
+        </p:spPr>
+        <p:txBody>
+          <a:bodyPr wrap="square" anchor="t" lIns="0" rIns="0" tIns="0" bIns="0">
+            <a:spAutoFit/>
+          </a:bodyPr>
+          <a:lstStyle/>
+          <a:p>
+            <a:pPr algn="l">
+              <a:lnSpc>
+                <a:spcPct val="135000"/>
+              </a:lnSpc>
+              <a:spcAft>
+                <a:spcPts val="0"/>
+              </a:spcAft>
+            </a:pPr>
+            <a:r>
+              <a:rPr sz="800" b="0">
+                <a:solidFill>
+                  <a:srgbClr val="5A5566"/>
+                </a:solidFill>
+                <a:latin typeface="Inter"/>
+              </a:rPr>
+              <a:t>Kafe, salon, klinika stoliga</a:t>
+            </a:r>
+          </a:p>
+        </p:txBody>
+      </p:sp>
+      <p:sp>
+        <p:nvSpPr>
+          <p:cNvPr id="39" name="TextBox 38"/>
+          <p:cNvSpPr txBox="1"/>
+          <p:nvPr/>
+        </p:nvSpPr>
+        <p:spPr>
+          <a:xfrm>
+            <a:off x="6350000" y="6019800"/>
+            <a:ext cx="2197100" cy="268224"/>
+          </a:xfrm>
+          <a:prstGeom prst="rect">
+            <a:avLst/>
+          </a:prstGeom>
+          <a:noFill/>
+        </p:spPr>
+        <p:txBody>
+          <a:bodyPr wrap="square" anchor="t" lIns="0" rIns="0" tIns="0" bIns="0">
+            <a:spAutoFit/>
+          </a:bodyPr>
+          <a:lstStyle/>
+          <a:p>
+            <a:pPr algn="l">
+              <a:lnSpc>
+                <a:spcPct val="135000"/>
+              </a:lnSpc>
+              <a:spcAft>
+                <a:spcPts val="0"/>
+              </a:spcAft>
+            </a:pPr>
+            <a:r>
+              <a:rPr sz="960" b="1">
+                <a:solidFill>
+                  <a:srgbClr val="4D7C0F"/>
+                </a:solidFill>
+                <a:latin typeface="Space Grotesk"/>
+              </a:rPr>
+              <a:t>Obyekt tarifida</a:t>
+            </a:r>
+          </a:p>
+        </p:txBody>
+      </p:sp>
+      <p:sp>
+        <p:nvSpPr>
+          <p:cNvPr id="40" name="Rounded Rectangle 39"/>
+          <p:cNvSpPr/>
+          <p:nvPr/>
+        </p:nvSpPr>
+        <p:spPr>
+          <a:xfrm>
+            <a:off x="8851900" y="4330700"/>
+            <a:ext cx="2527300" cy="1993900"/>
+          </a:xfrm>
+          <a:prstGeom prst="roundRect">
+            <a:avLst>
+              <a:gd name="adj" fmla="val 8917"/>
+            </a:avLst>
+          </a:prstGeom>
+          <a:solidFill>
+            <a:srgbClr val="FFFFFF"/>
+          </a:solidFill>
+          <a:ln w="9525">
+            <a:solidFill>
+              <a:srgbClr val="E6E4EA"/>
+            </a:solidFill>
+          </a:ln>
+          <a:effectLst/>
+        </p:spPr>
+        <p:style>
+          <a:lnRef idx="1">
+            <a:schemeClr val="accent1"/>
+          </a:lnRef>
+          <a:fillRef idx="3">
+            <a:schemeClr val="accent1"/>
+          </a:fillRef>
+          <a:effectRef idx="2">
+            <a:schemeClr val="accent1"/>
+          </a:effectRef>
+          <a:fontRef idx="minor">
+            <a:schemeClr val="lt1"/>
+          </a:fontRef>
+        </p:style>
+        <p:txBody>
+          <a:bodyPr rtlCol="0" anchor="ctr" wrap="square"/>
+          <a:lstStyle/>
+          <a:p>
+            <a:pPr algn="ctr"/>
+          </a:p>
+        </p:txBody>
+      </p:sp>
+      <p:pic>
+        <p:nvPicPr>
+          <p:cNvPr id="41" name="Picture 40" descr="konsyerj.jpg"/>
+          <p:cNvPicPr>
+            <a:picLocks noChangeAspect="1"/>
+          </p:cNvPicPr>
+          <p:nvPr/>
+        </p:nvPicPr>
+        <p:blipFill>
+          <a:blip r:embed="rId9"/>
+          <a:srcRect t="24854" b="24854"/>
+          <a:stretch>
+            <a:fillRect/>
+          </a:stretch>
+        </p:blipFill>
+        <p:spPr>
+          <a:xfrm>
+            <a:off x="8953500" y="4432300"/>
+            <a:ext cx="2324100" cy="914400"/>
+          </a:xfrm>
+          <a:prstGeom prst="rect">
+            <a:avLst/>
+          </a:prstGeom>
+        </p:spPr>
+      </p:pic>
+      <p:sp>
+        <p:nvSpPr>
+          <p:cNvPr id="42" name="TextBox 41"/>
+          <p:cNvSpPr txBox="1"/>
+          <p:nvPr/>
+        </p:nvSpPr>
+        <p:spPr>
+          <a:xfrm>
+            <a:off x="9029700" y="5537200"/>
+            <a:ext cx="2197100" cy="307340"/>
+          </a:xfrm>
+          <a:prstGeom prst="rect">
+            <a:avLst/>
+          </a:prstGeom>
+          <a:noFill/>
+        </p:spPr>
+        <p:txBody>
+          <a:bodyPr wrap="square" anchor="t" lIns="0" rIns="0" tIns="0" bIns="0">
+            <a:spAutoFit/>
+          </a:bodyPr>
+          <a:lstStyle/>
+          <a:p>
+            <a:pPr algn="l">
+              <a:lnSpc>
+                <a:spcPct val="135000"/>
+              </a:lnSpc>
+              <a:spcAft>
+                <a:spcPts val="0"/>
+              </a:spcAft>
+            </a:pPr>
+            <a:r>
+              <a:rPr sz="1100" b="1">
+                <a:solidFill>
+                  <a:srgbClr val="0E0A1B"/>
+                </a:solidFill>
+                <a:latin typeface="Space Grotesk"/>
+              </a:rPr>
               <a:t>Konsyerj plitasi</a:t>
             </a:r>
           </a:p>
@@ -20243,14 +20641,14 @@
       </p:sp>
       <p:sp>
         <p:nvSpPr>
-          <p:cNvPr id="33" name="TextBox 32"/>
-          <p:cNvSpPr txBox="1"/>
-          <p:nvPr/>
-        </p:nvSpPr>
-        <p:spPr>
-          <a:xfrm>
-            <a:off x="8128000" y="5816600"/>
-            <a:ext cx="2997200" cy="245872"/>
+          <p:cNvPr id="43" name="TextBox 42"/>
+          <p:cNvSpPr txBox="1"/>
+          <p:nvPr/>
+        </p:nvSpPr>
+        <p:spPr>
+          <a:xfrm>
+            <a:off x="9029700" y="5753100"/>
+            <a:ext cx="2197100" cy="223520"/>
           </a:xfrm>
           <a:prstGeom prst="rect">
             <a:avLst/>
@@ -20272,7 +20670,7 @@
               </a:spcAft>
             </a:pPr>
             <a:r>
-              <a:rPr sz="880" b="0">
+              <a:rPr sz="800" b="0">
                 <a:solidFill>
                   <a:srgbClr val="5A5566"/>
                 </a:solidFill>
@@ -20285,14 +20683,14 @@
       </p:sp>
       <p:sp>
         <p:nvSpPr>
-          <p:cNvPr id="34" name="TextBox 33"/>
-          <p:cNvSpPr txBox="1"/>
-          <p:nvPr/>
-        </p:nvSpPr>
-        <p:spPr>
-          <a:xfrm>
-            <a:off x="8128000" y="6045200"/>
-            <a:ext cx="2997200" cy="293370"/>
+          <p:cNvPr id="44" name="TextBox 43"/>
+          <p:cNvSpPr txBox="1"/>
+          <p:nvPr/>
+        </p:nvSpPr>
+        <p:spPr>
+          <a:xfrm>
+            <a:off x="9029700" y="6019800"/>
+            <a:ext cx="2197100" cy="268224"/>
           </a:xfrm>
           <a:prstGeom prst="rect">
             <a:avLst/>
@@ -20314,7 +20712,7 @@
               </a:spcAft>
             </a:pPr>
             <a:r>
-              <a:rPr sz="1050" b="1">
+              <a:rPr sz="960" b="1">
                 <a:solidFill>
                   <a:srgbClr val="4D7C0F"/>
                 </a:solidFill>
@@ -20327,7 +20725,7 @@
       </p:sp>
       <p:sp>
         <p:nvSpPr>
-          <p:cNvPr id="35" name="TextBox 34"/>
+          <p:cNvPr id="45" name="TextBox 44"/>
           <p:cNvSpPr txBox="1"/>
           <p:nvPr/>
         </p:nvSpPr>
@@ -20369,7 +20767,7 @@
       </p:sp>
       <p:sp>
         <p:nvSpPr>
-          <p:cNvPr id="36" name="TextBox 35"/>
+          <p:cNvPr id="46" name="TextBox 45"/>
           <p:cNvSpPr txBox="1"/>
           <p:nvPr/>
         </p:nvSpPr>

--- a/deck/flex-pitch-uz.pptx
+++ b/deck/flex-pitch-uz.pptx
@@ -124,6 +124,1876 @@
     </a:lvl9pPr>
   </p:defaultTextStyle>
 </p:presentation>
+</file>
+
+<file path=ppt/notesMasters/notesMaster1.xml><?xml version="1.0" encoding="utf-8"?>
+<p:notesMaster xmlns:a="http://schemas.openxmlformats.org/drawingml/2006/main" xmlns:p="http://schemas.openxmlformats.org/presentationml/2006/main" xmlns:r="http://schemas.openxmlformats.org/officeDocument/2006/relationships">
+  <p:cSld>
+    <p:bg>
+      <p:bgRef idx="1001">
+        <a:schemeClr val="bg1"/>
+      </p:bgRef>
+    </p:bg>
+    <p:spTree>
+      <p:nvGrpSpPr>
+        <p:cNvPr id="1" name=""/>
+        <p:cNvGrpSpPr/>
+        <p:nvPr/>
+      </p:nvGrpSpPr>
+      <p:grpSpPr>
+        <a:xfrm>
+          <a:off x="0" y="0"/>
+          <a:ext cx="0" cy="0"/>
+          <a:chOff x="0" y="0"/>
+          <a:chExt cx="0" cy="0"/>
+        </a:xfrm>
+      </p:grpSpPr>
+      <p:sp>
+        <p:nvSpPr>
+          <p:cNvPr id="2" name="Header Placeholder 1"/>
+          <p:cNvSpPr>
+            <a:spLocks noGrp="1"/>
+          </p:cNvSpPr>
+          <p:nvPr>
+            <p:ph type="hdr" sz="quarter"/>
+          </p:nvPr>
+        </p:nvSpPr>
+        <p:spPr>
+          <a:xfrm>
+            <a:off x="0" y="0"/>
+            <a:ext cx="2971800" cy="457200"/>
+          </a:xfrm>
+          <a:prstGeom prst="rect">
+            <a:avLst/>
+          </a:prstGeom>
+        </p:spPr>
+        <p:txBody>
+          <a:bodyPr vert="horz" lIns="91440" tIns="45720" rIns="91440" bIns="45720" rtlCol="0"/>
+          <a:lstStyle>
+            <a:lvl1pPr algn="l">
+              <a:defRPr sz="1200"/>
+            </a:lvl1pPr>
+          </a:lstStyle>
+          <a:p>
+            <a:endParaRPr lang="en-US"/>
+          </a:p>
+        </p:txBody>
+      </p:sp>
+      <p:sp>
+        <p:nvSpPr>
+          <p:cNvPr id="3" name="Date Placeholder 2"/>
+          <p:cNvSpPr>
+            <a:spLocks noGrp="1"/>
+          </p:cNvSpPr>
+          <p:nvPr>
+            <p:ph type="dt" idx="1"/>
+          </p:nvPr>
+        </p:nvSpPr>
+        <p:spPr>
+          <a:xfrm>
+            <a:off x="3884613" y="0"/>
+            <a:ext cx="2971800" cy="457200"/>
+          </a:xfrm>
+          <a:prstGeom prst="rect">
+            <a:avLst/>
+          </a:prstGeom>
+        </p:spPr>
+        <p:txBody>
+          <a:bodyPr vert="horz" lIns="91440" tIns="45720" rIns="91440" bIns="45720" rtlCol="0"/>
+          <a:lstStyle>
+            <a:lvl1pPr algn="r">
+              <a:defRPr sz="1200"/>
+            </a:lvl1pPr>
+          </a:lstStyle>
+          <a:p>
+            <a:fld id="{0F89C1C7-3DCD-1040-A9CF-14679D8B5DDD}" type="datetimeFigureOut">
+              <a:rPr lang="en-US" smtClean="0"/>
+              <a:t>10/17/16</a:t>
+            </a:fld>
+            <a:endParaRPr lang="en-US"/>
+          </a:p>
+        </p:txBody>
+      </p:sp>
+      <p:sp>
+        <p:nvSpPr>
+          <p:cNvPr id="4" name="Slide Image Placeholder 3"/>
+          <p:cNvSpPr>
+            <a:spLocks noGrp="1" noRot="1" noChangeAspect="1"/>
+          </p:cNvSpPr>
+          <p:nvPr>
+            <p:ph type="sldImg" idx="2"/>
+          </p:nvPr>
+        </p:nvSpPr>
+        <p:spPr>
+          <a:xfrm>
+            <a:off x="1143000" y="685800"/>
+            <a:ext cx="4572000" cy="3429000"/>
+          </a:xfrm>
+          <a:prstGeom prst="rect">
+            <a:avLst/>
+          </a:prstGeom>
+          <a:noFill/>
+          <a:ln w="12700">
+            <a:solidFill>
+              <a:prstClr val="black"/>
+            </a:solidFill>
+          </a:ln>
+        </p:spPr>
+        <p:txBody>
+          <a:bodyPr vert="horz" lIns="91440" tIns="45720" rIns="91440" bIns="45720" rtlCol="0" anchor="ctr"/>
+          <a:lstStyle/>
+          <a:p>
+            <a:endParaRPr lang="en-US"/>
+          </a:p>
+        </p:txBody>
+      </p:sp>
+      <p:sp>
+        <p:nvSpPr>
+          <p:cNvPr id="5" name="Notes Placeholder 4"/>
+          <p:cNvSpPr>
+            <a:spLocks noGrp="1"/>
+          </p:cNvSpPr>
+          <p:nvPr>
+            <p:ph type="body" sz="quarter" idx="3"/>
+          </p:nvPr>
+        </p:nvSpPr>
+        <p:spPr>
+          <a:xfrm>
+            <a:off x="685800" y="4343400"/>
+            <a:ext cx="5486400" cy="4114800"/>
+          </a:xfrm>
+          <a:prstGeom prst="rect">
+            <a:avLst/>
+          </a:prstGeom>
+        </p:spPr>
+        <p:txBody>
+          <a:bodyPr vert="horz" lIns="91440" tIns="45720" rIns="91440" bIns="45720" rtlCol="0"/>
+          <a:lstStyle/>
+          <a:p>
+            <a:pPr lvl="0"/>
+            <a:r>
+              <a:rPr lang="en-US" smtClean="0"/>
+              <a:t>Click to edit Master text styles</a:t>
+            </a:r>
+          </a:p>
+          <a:p>
+            <a:pPr lvl="1"/>
+            <a:r>
+              <a:rPr lang="en-US" smtClean="0"/>
+              <a:t>Second level</a:t>
+            </a:r>
+          </a:p>
+          <a:p>
+            <a:pPr lvl="2"/>
+            <a:r>
+              <a:rPr lang="en-US" smtClean="0"/>
+              <a:t>Third level</a:t>
+            </a:r>
+          </a:p>
+          <a:p>
+            <a:pPr lvl="3"/>
+            <a:r>
+              <a:rPr lang="en-US" smtClean="0"/>
+              <a:t>Fourth level</a:t>
+            </a:r>
+          </a:p>
+          <a:p>
+            <a:pPr lvl="4"/>
+            <a:r>
+              <a:rPr lang="en-US" smtClean="0"/>
+              <a:t>Fifth level</a:t>
+            </a:r>
+            <a:endParaRPr lang="en-US"/>
+          </a:p>
+        </p:txBody>
+      </p:sp>
+      <p:sp>
+        <p:nvSpPr>
+          <p:cNvPr id="6" name="Footer Placeholder 5"/>
+          <p:cNvSpPr>
+            <a:spLocks noGrp="1"/>
+          </p:cNvSpPr>
+          <p:nvPr>
+            <p:ph type="ftr" sz="quarter" idx="4"/>
+          </p:nvPr>
+        </p:nvSpPr>
+        <p:spPr>
+          <a:xfrm>
+            <a:off x="0" y="8685213"/>
+            <a:ext cx="2971800" cy="457200"/>
+          </a:xfrm>
+          <a:prstGeom prst="rect">
+            <a:avLst/>
+          </a:prstGeom>
+        </p:spPr>
+        <p:txBody>
+          <a:bodyPr vert="horz" lIns="91440" tIns="45720" rIns="91440" bIns="45720" rtlCol="0" anchor="b"/>
+          <a:lstStyle>
+            <a:lvl1pPr algn="l">
+              <a:defRPr sz="1200"/>
+            </a:lvl1pPr>
+          </a:lstStyle>
+          <a:p>
+            <a:endParaRPr lang="en-US"/>
+          </a:p>
+        </p:txBody>
+      </p:sp>
+      <p:sp>
+        <p:nvSpPr>
+          <p:cNvPr id="7" name="Slide Number Placeholder 6"/>
+          <p:cNvSpPr>
+            <a:spLocks noGrp="1"/>
+          </p:cNvSpPr>
+          <p:nvPr>
+            <p:ph type="sldNum" sz="quarter" idx="5"/>
+          </p:nvPr>
+        </p:nvSpPr>
+        <p:spPr>
+          <a:xfrm>
+            <a:off x="3884613" y="8685213"/>
+            <a:ext cx="2971800" cy="457200"/>
+          </a:xfrm>
+          <a:prstGeom prst="rect">
+            <a:avLst/>
+          </a:prstGeom>
+        </p:spPr>
+        <p:txBody>
+          <a:bodyPr vert="horz" lIns="91440" tIns="45720" rIns="91440" bIns="45720" rtlCol="0" anchor="b"/>
+          <a:lstStyle>
+            <a:lvl1pPr algn="r">
+              <a:defRPr sz="1200"/>
+            </a:lvl1pPr>
+          </a:lstStyle>
+          <a:p>
+            <a:fld id="{BB5E49A5-4136-284D-997B-48E1D791AD67}" type="slidenum">
+              <a:rPr lang="en-US" smtClean="0"/>
+              <a:t>‹#›</a:t>
+            </a:fld>
+            <a:endParaRPr lang="en-US"/>
+          </a:p>
+        </p:txBody>
+      </p:sp>
+    </p:spTree>
+    <p:extLst>
+      <p:ext uri="{BB962C8B-B14F-4D97-AF65-F5344CB8AC3E}">
+        <p14:creationId xmlns:p14="http://schemas.microsoft.com/office/powerpoint/2010/main" val="2623252185"/>
+      </p:ext>
+    </p:extLst>
+  </p:cSld>
+  <p:clrMap bg1="lt1" tx1="dk1" bg2="lt2" tx2="dk2" accent1="accent1" accent2="accent2" accent3="accent3" accent4="accent4" accent5="accent5" accent6="accent6" hlink="hlink" folHlink="folHlink"/>
+  <p:notesStyle>
+    <a:lvl1pPr marL="0" algn="l" defTabSz="457200" rtl="0" eaLnBrk="1" latinLnBrk="0" hangingPunct="1">
+      <a:defRPr sz="1200" kern="1200">
+        <a:solidFill>
+          <a:schemeClr val="tx1"/>
+        </a:solidFill>
+        <a:latin typeface="+mn-lt"/>
+        <a:ea typeface="+mn-ea"/>
+        <a:cs typeface="+mn-cs"/>
+      </a:defRPr>
+    </a:lvl1pPr>
+    <a:lvl2pPr marL="457200" algn="l" defTabSz="457200" rtl="0" eaLnBrk="1" latinLnBrk="0" hangingPunct="1">
+      <a:defRPr sz="1200" kern="1200">
+        <a:solidFill>
+          <a:schemeClr val="tx1"/>
+        </a:solidFill>
+        <a:latin typeface="+mn-lt"/>
+        <a:ea typeface="+mn-ea"/>
+        <a:cs typeface="+mn-cs"/>
+      </a:defRPr>
+    </a:lvl2pPr>
+    <a:lvl3pPr marL="914400" algn="l" defTabSz="457200" rtl="0" eaLnBrk="1" latinLnBrk="0" hangingPunct="1">
+      <a:defRPr sz="1200" kern="1200">
+        <a:solidFill>
+          <a:schemeClr val="tx1"/>
+        </a:solidFill>
+        <a:latin typeface="+mn-lt"/>
+        <a:ea typeface="+mn-ea"/>
+        <a:cs typeface="+mn-cs"/>
+      </a:defRPr>
+    </a:lvl3pPr>
+    <a:lvl4pPr marL="1371600" algn="l" defTabSz="457200" rtl="0" eaLnBrk="1" latinLnBrk="0" hangingPunct="1">
+      <a:defRPr sz="1200" kern="1200">
+        <a:solidFill>
+          <a:schemeClr val="tx1"/>
+        </a:solidFill>
+        <a:latin typeface="+mn-lt"/>
+        <a:ea typeface="+mn-ea"/>
+        <a:cs typeface="+mn-cs"/>
+      </a:defRPr>
+    </a:lvl4pPr>
+    <a:lvl5pPr marL="1828800" algn="l" defTabSz="457200" rtl="0" eaLnBrk="1" latinLnBrk="0" hangingPunct="1">
+      <a:defRPr sz="1200" kern="1200">
+        <a:solidFill>
+          <a:schemeClr val="tx1"/>
+        </a:solidFill>
+        <a:latin typeface="+mn-lt"/>
+        <a:ea typeface="+mn-ea"/>
+        <a:cs typeface="+mn-cs"/>
+      </a:defRPr>
+    </a:lvl5pPr>
+    <a:lvl6pPr marL="2286000" algn="l" defTabSz="457200" rtl="0" eaLnBrk="1" latinLnBrk="0" hangingPunct="1">
+      <a:defRPr sz="1200" kern="1200">
+        <a:solidFill>
+          <a:schemeClr val="tx1"/>
+        </a:solidFill>
+        <a:latin typeface="+mn-lt"/>
+        <a:ea typeface="+mn-ea"/>
+        <a:cs typeface="+mn-cs"/>
+      </a:defRPr>
+    </a:lvl6pPr>
+    <a:lvl7pPr marL="2743200" algn="l" defTabSz="457200" rtl="0" eaLnBrk="1" latinLnBrk="0" hangingPunct="1">
+      <a:defRPr sz="1200" kern="1200">
+        <a:solidFill>
+          <a:schemeClr val="tx1"/>
+        </a:solidFill>
+        <a:latin typeface="+mn-lt"/>
+        <a:ea typeface="+mn-ea"/>
+        <a:cs typeface="+mn-cs"/>
+      </a:defRPr>
+    </a:lvl7pPr>
+    <a:lvl8pPr marL="3200400" algn="l" defTabSz="457200" rtl="0" eaLnBrk="1" latinLnBrk="0" hangingPunct="1">
+      <a:defRPr sz="1200" kern="1200">
+        <a:solidFill>
+          <a:schemeClr val="tx1"/>
+        </a:solidFill>
+        <a:latin typeface="+mn-lt"/>
+        <a:ea typeface="+mn-ea"/>
+        <a:cs typeface="+mn-cs"/>
+      </a:defRPr>
+    </a:lvl8pPr>
+    <a:lvl9pPr marL="3657600" algn="l" defTabSz="457200" rtl="0" eaLnBrk="1" latinLnBrk="0" hangingPunct="1">
+      <a:defRPr sz="1200" kern="1200">
+        <a:solidFill>
+          <a:schemeClr val="tx1"/>
+        </a:solidFill>
+        <a:latin typeface="+mn-lt"/>
+        <a:ea typeface="+mn-ea"/>
+        <a:cs typeface="+mn-cs"/>
+      </a:defRPr>
+    </a:lvl9pPr>
+  </p:notesStyle>
+</p:notesMaster>
+</file>
+
+<file path=ppt/notesSlides/notesSlide1.xml><?xml version="1.0" encoding="utf-8"?>
+<p:notes xmlns:a="http://schemas.openxmlformats.org/drawingml/2006/main" xmlns:p="http://schemas.openxmlformats.org/presentationml/2006/main" xmlns:r="http://schemas.openxmlformats.org/officeDocument/2006/relationships">
+  <p:cSld>
+    <p:spTree>
+      <p:nvGrpSpPr>
+        <p:cNvPr id="1" name=""/>
+        <p:cNvGrpSpPr/>
+        <p:nvPr/>
+      </p:nvGrpSpPr>
+      <p:grpSpPr>
+        <a:xfrm>
+          <a:off x="0" y="0"/>
+          <a:ext cx="0" cy="0"/>
+          <a:chOff x="0" y="0"/>
+          <a:chExt cx="0" cy="0"/>
+        </a:xfrm>
+      </p:grpSpPr>
+      <p:sp>
+        <p:nvSpPr>
+          <p:cNvPr id="2" name="Slide Image Placeholder 1"/>
+          <p:cNvSpPr>
+            <a:spLocks noGrp="1"/>
+          </p:cNvSpPr>
+          <p:nvPr>
+            <p:ph type="sldImg" idx="2"/>
+          </p:nvPr>
+        </p:nvSpPr>
+        <p:spPr/>
+      </p:sp>
+      <p:sp>
+        <p:nvSpPr>
+          <p:cNvPr id="3" name="Notes Placeholder 2"/>
+          <p:cNvSpPr>
+            <a:spLocks noGrp="1"/>
+          </p:cNvSpPr>
+          <p:nvPr>
+            <p:ph type="body" idx="3" sz="quarter"/>
+          </p:nvPr>
+        </p:nvSpPr>
+        <p:spPr/>
+        <p:txBody>
+          <a:bodyPr/>
+          <a:lstStyle/>
+          <a:p>
+            <a:r>
+              <a:t>1/20  ·  [3 DAQIQA]</a:t>
+            </a:r>
+          </a:p>
+          <a:p/>
+          <a:p>
+            <a:r>
+              <a:t>Assalomu alaykum. Men Javohir, FLEX asoschisi. Biz odamga va biznesga umrbod noyob raqam beramiz, va o'sha raqamni ochadigan NFC buyum sotamiz. Uch daqiqada nima qurayotganimizni va nega bu ishlayotganini aytaman.</a:t>
+            </a:r>
+          </a:p>
+        </p:txBody>
+      </p:sp>
+      <p:sp>
+        <p:nvSpPr>
+          <p:cNvPr id="4" name="Slide Number Placeholder 3"/>
+          <p:cNvSpPr>
+            <a:spLocks noGrp="1"/>
+          </p:cNvSpPr>
+          <p:nvPr>
+            <p:ph type="sldNum" idx="5" sz="quarter"/>
+          </p:nvPr>
+        </p:nvSpPr>
+        <p:spPr/>
+      </p:sp>
+    </p:spTree>
+  </p:cSld>
+  <p:clrMapOvr>
+    <a:masterClrMapping/>
+  </p:clrMapOvr>
+</p:notes>
+</file>
+
+<file path=ppt/notesSlides/notesSlide10.xml><?xml version="1.0" encoding="utf-8"?>
+<p:notes xmlns:a="http://schemas.openxmlformats.org/drawingml/2006/main" xmlns:p="http://schemas.openxmlformats.org/presentationml/2006/main" xmlns:r="http://schemas.openxmlformats.org/officeDocument/2006/relationships">
+  <p:cSld>
+    <p:spTree>
+      <p:nvGrpSpPr>
+        <p:cNvPr id="1" name=""/>
+        <p:cNvGrpSpPr/>
+        <p:nvPr/>
+      </p:nvGrpSpPr>
+      <p:grpSpPr>
+        <a:xfrm>
+          <a:off x="0" y="0"/>
+          <a:ext cx="0" cy="0"/>
+          <a:chOff x="0" y="0"/>
+          <a:chExt cx="0" cy="0"/>
+        </a:xfrm>
+      </p:grpSpPr>
+      <p:sp>
+        <p:nvSpPr>
+          <p:cNvPr id="2" name="Slide Image Placeholder 1"/>
+          <p:cNvSpPr>
+            <a:spLocks noGrp="1"/>
+          </p:cNvSpPr>
+          <p:nvPr>
+            <p:ph type="sldImg" idx="2"/>
+          </p:nvPr>
+        </p:nvSpPr>
+        <p:spPr/>
+      </p:sp>
+      <p:sp>
+        <p:nvSpPr>
+          <p:cNvPr id="3" name="Notes Placeholder 2"/>
+          <p:cNvSpPr>
+            <a:spLocks noGrp="1"/>
+          </p:cNvSpPr>
+          <p:nvPr>
+            <p:ph type="body" idx="3" sz="quarter"/>
+          </p:nvPr>
+        </p:nvSpPr>
+        <p:spPr/>
+        <p:txBody>
+          <a:bodyPr/>
+          <a:lstStyle/>
+          <a:p>
+            <a:r>
+              <a:t>10/20</a:t>
+            </a:r>
+          </a:p>
+          <a:p/>
+          <a:p>
+            <a:r>
+              <a:t>Eng muhim qatorga qarang: obyekt yarmi. UNQX shaxsiy vizitka sotadi va shu bilan tugaydi. Popl va V1CE — xalqaro, lekin o'zbek tili ham, hisob-faktura ham yo'q. Mahalliy hech kim obyekt tomonini sotmaydi. Ular bir marta sotadi, biz har oy to'lov olamiz.</a:t>
+            </a:r>
+          </a:p>
+        </p:txBody>
+      </p:sp>
+      <p:sp>
+        <p:nvSpPr>
+          <p:cNvPr id="4" name="Slide Number Placeholder 3"/>
+          <p:cNvSpPr>
+            <a:spLocks noGrp="1"/>
+          </p:cNvSpPr>
+          <p:nvPr>
+            <p:ph type="sldNum" idx="5" sz="quarter"/>
+          </p:nvPr>
+        </p:nvSpPr>
+        <p:spPr/>
+      </p:sp>
+    </p:spTree>
+  </p:cSld>
+  <p:clrMapOvr>
+    <a:masterClrMapping/>
+  </p:clrMapOvr>
+</p:notes>
+</file>
+
+<file path=ppt/notesSlides/notesSlide11.xml><?xml version="1.0" encoding="utf-8"?>
+<p:notes xmlns:a="http://schemas.openxmlformats.org/drawingml/2006/main" xmlns:p="http://schemas.openxmlformats.org/presentationml/2006/main" xmlns:r="http://schemas.openxmlformats.org/officeDocument/2006/relationships">
+  <p:cSld>
+    <p:spTree>
+      <p:nvGrpSpPr>
+        <p:cNvPr id="1" name=""/>
+        <p:cNvGrpSpPr/>
+        <p:nvPr/>
+      </p:nvGrpSpPr>
+      <p:grpSpPr>
+        <a:xfrm>
+          <a:off x="0" y="0"/>
+          <a:ext cx="0" cy="0"/>
+          <a:chOff x="0" y="0"/>
+          <a:chExt cx="0" cy="0"/>
+        </a:xfrm>
+      </p:grpSpPr>
+      <p:sp>
+        <p:nvSpPr>
+          <p:cNvPr id="2" name="Slide Image Placeholder 1"/>
+          <p:cNvSpPr>
+            <a:spLocks noGrp="1"/>
+          </p:cNvSpPr>
+          <p:nvPr>
+            <p:ph type="sldImg" idx="2"/>
+          </p:nvPr>
+        </p:nvSpPr>
+        <p:spPr/>
+      </p:sp>
+      <p:sp>
+        <p:nvSpPr>
+          <p:cNvPr id="3" name="Notes Placeholder 2"/>
+          <p:cNvSpPr>
+            <a:spLocks noGrp="1"/>
+          </p:cNvSpPr>
+          <p:nvPr>
+            <p:ph type="body" idx="3" sz="quarter"/>
+          </p:nvPr>
+        </p:nvSpPr>
+        <p:spPr/>
+        <p:txBody>
+          <a:bodyPr/>
+          <a:lstStyle/>
+          <a:p>
+            <a:r>
+              <a:t>11/20</a:t>
+            </a:r>
+          </a:p>
+          <a:p/>
+          <a:p>
+            <a:r>
+              <a:t>Obyekt qanday ishlaydi. Har stolning o'z kodi bor, mehmon tegizadi, so'rov kassaga stol raqami bilan tushadi va ovoz chiqaradi. Ofitsiant qo'l ko'targan stolni izlamaydi — ekran aytadi.</a:t>
+            </a:r>
+          </a:p>
+        </p:txBody>
+      </p:sp>
+      <p:sp>
+        <p:nvSpPr>
+          <p:cNvPr id="4" name="Slide Number Placeholder 3"/>
+          <p:cNvSpPr>
+            <a:spLocks noGrp="1"/>
+          </p:cNvSpPr>
+          <p:nvPr>
+            <p:ph type="sldNum" idx="5" sz="quarter"/>
+          </p:nvPr>
+        </p:nvSpPr>
+        <p:spPr/>
+      </p:sp>
+    </p:spTree>
+  </p:cSld>
+  <p:clrMapOvr>
+    <a:masterClrMapping/>
+  </p:clrMapOvr>
+</p:notes>
+</file>
+
+<file path=ppt/notesSlides/notesSlide12.xml><?xml version="1.0" encoding="utf-8"?>
+<p:notes xmlns:a="http://schemas.openxmlformats.org/drawingml/2006/main" xmlns:p="http://schemas.openxmlformats.org/presentationml/2006/main" xmlns:r="http://schemas.openxmlformats.org/officeDocument/2006/relationships">
+  <p:cSld>
+    <p:spTree>
+      <p:nvGrpSpPr>
+        <p:cNvPr id="1" name=""/>
+        <p:cNvGrpSpPr/>
+        <p:nvPr/>
+      </p:nvGrpSpPr>
+      <p:grpSpPr>
+        <a:xfrm>
+          <a:off x="0" y="0"/>
+          <a:ext cx="0" cy="0"/>
+          <a:chOff x="0" y="0"/>
+          <a:chExt cx="0" cy="0"/>
+        </a:xfrm>
+      </p:grpSpPr>
+      <p:sp>
+        <p:nvSpPr>
+          <p:cNvPr id="2" name="Slide Image Placeholder 1"/>
+          <p:cNvSpPr>
+            <a:spLocks noGrp="1"/>
+          </p:cNvSpPr>
+          <p:nvPr>
+            <p:ph type="sldImg" idx="2"/>
+          </p:nvPr>
+        </p:nvSpPr>
+        <p:spPr/>
+      </p:sp>
+      <p:sp>
+        <p:nvSpPr>
+          <p:cNvPr id="3" name="Notes Placeholder 2"/>
+          <p:cNvSpPr>
+            <a:spLocks noGrp="1"/>
+          </p:cNvSpPr>
+          <p:nvPr>
+            <p:ph type="body" idx="3" sz="quarter"/>
+          </p:nvPr>
+        </p:nvSpPr>
+        <p:spPr/>
+        <p:txBody>
+          <a:bodyPr/>
+          <a:lstStyle/>
+          <a:p>
+            <a:r>
+              <a:t>12/20</a:t>
+            </a:r>
+          </a:p>
+          <a:p/>
+          <a:p>
+            <a:r>
+              <a:t>Bu o'rnatishning hammasi. Egasi stollarni yozadi, varaqni chop etadi va har stolga bittadan qo'yadi. Bizdan usta kelishi shart emas. Dushanba bosiladi, seshanba javob beradi.</a:t>
+            </a:r>
+          </a:p>
+        </p:txBody>
+      </p:sp>
+      <p:sp>
+        <p:nvSpPr>
+          <p:cNvPr id="4" name="Slide Number Placeholder 3"/>
+          <p:cNvSpPr>
+            <a:spLocks noGrp="1"/>
+          </p:cNvSpPr>
+          <p:nvPr>
+            <p:ph type="sldNum" idx="5" sz="quarter"/>
+          </p:nvPr>
+        </p:nvSpPr>
+        <p:spPr/>
+      </p:sp>
+    </p:spTree>
+  </p:cSld>
+  <p:clrMapOvr>
+    <a:masterClrMapping/>
+  </p:clrMapOvr>
+</p:notes>
+</file>
+
+<file path=ppt/notesSlides/notesSlide13.xml><?xml version="1.0" encoding="utf-8"?>
+<p:notes xmlns:a="http://schemas.openxmlformats.org/drawingml/2006/main" xmlns:p="http://schemas.openxmlformats.org/presentationml/2006/main" xmlns:r="http://schemas.openxmlformats.org/officeDocument/2006/relationships">
+  <p:cSld>
+    <p:spTree>
+      <p:nvGrpSpPr>
+        <p:cNvPr id="1" name=""/>
+        <p:cNvGrpSpPr/>
+        <p:nvPr/>
+      </p:nvGrpSpPr>
+      <p:grpSpPr>
+        <a:xfrm>
+          <a:off x="0" y="0"/>
+          <a:ext cx="0" cy="0"/>
+          <a:chOff x="0" y="0"/>
+          <a:chExt cx="0" cy="0"/>
+        </a:xfrm>
+      </p:grpSpPr>
+      <p:sp>
+        <p:nvSpPr>
+          <p:cNvPr id="2" name="Slide Image Placeholder 1"/>
+          <p:cNvSpPr>
+            <a:spLocks noGrp="1"/>
+          </p:cNvSpPr>
+          <p:nvPr>
+            <p:ph type="sldImg" idx="2"/>
+          </p:nvPr>
+        </p:nvSpPr>
+        <p:spPr/>
+      </p:sp>
+      <p:sp>
+        <p:nvSpPr>
+          <p:cNvPr id="3" name="Notes Placeholder 2"/>
+          <p:cNvSpPr>
+            <a:spLocks noGrp="1"/>
+          </p:cNvSpPr>
+          <p:nvPr>
+            <p:ph type="body" idx="3" sz="quarter"/>
+          </p:nvPr>
+        </p:nvSpPr>
+        <p:spPr/>
+        <p:txBody>
+          <a:bodyPr/>
+          <a:lstStyle/>
+          <a:p>
+            <a:r>
+              <a:t>13/20</a:t>
+            </a:r>
+          </a:p>
+          <a:p/>
+          <a:p>
+            <a:r>
+              <a:t>Ikki xil pul. Raqam va qurilma — bir marta. Obyekt — har oy. Firma hisob-faktura bilan to'laydi, chunki O'zbekistonda biznes aynan shunday to'laydi; kartadan to'lash taklif qilsangiz buxgalter rad qiladi.</a:t>
+            </a:r>
+          </a:p>
+        </p:txBody>
+      </p:sp>
+      <p:sp>
+        <p:nvSpPr>
+          <p:cNvPr id="4" name="Slide Number Placeholder 3"/>
+          <p:cNvSpPr>
+            <a:spLocks noGrp="1"/>
+          </p:cNvSpPr>
+          <p:nvPr>
+            <p:ph type="sldNum" idx="5" sz="quarter"/>
+          </p:nvPr>
+        </p:nvSpPr>
+        <p:spPr/>
+      </p:sp>
+    </p:spTree>
+  </p:cSld>
+  <p:clrMapOvr>
+    <a:masterClrMapping/>
+  </p:clrMapOvr>
+</p:notes>
+</file>
+
+<file path=ppt/notesSlides/notesSlide14.xml><?xml version="1.0" encoding="utf-8"?>
+<p:notes xmlns:a="http://schemas.openxmlformats.org/drawingml/2006/main" xmlns:p="http://schemas.openxmlformats.org/presentationml/2006/main" xmlns:r="http://schemas.openxmlformats.org/officeDocument/2006/relationships">
+  <p:cSld>
+    <p:spTree>
+      <p:nvGrpSpPr>
+        <p:cNvPr id="1" name=""/>
+        <p:cNvGrpSpPr/>
+        <p:nvPr/>
+      </p:nvGrpSpPr>
+      <p:grpSpPr>
+        <a:xfrm>
+          <a:off x="0" y="0"/>
+          <a:ext cx="0" cy="0"/>
+          <a:chOff x="0" y="0"/>
+          <a:chExt cx="0" cy="0"/>
+        </a:xfrm>
+      </p:grpSpPr>
+      <p:sp>
+        <p:nvSpPr>
+          <p:cNvPr id="2" name="Slide Image Placeholder 1"/>
+          <p:cNvSpPr>
+            <a:spLocks noGrp="1"/>
+          </p:cNvSpPr>
+          <p:nvPr>
+            <p:ph type="sldImg" idx="2"/>
+          </p:nvPr>
+        </p:nvSpPr>
+        <p:spPr/>
+      </p:sp>
+      <p:sp>
+        <p:nvSpPr>
+          <p:cNvPr id="3" name="Notes Placeholder 2"/>
+          <p:cNvSpPr>
+            <a:spLocks noGrp="1"/>
+          </p:cNvSpPr>
+          <p:nvPr>
+            <p:ph type="body" idx="3" sz="quarter"/>
+          </p:nvPr>
+        </p:nvSpPr>
+        <p:spPr/>
+        <p:txBody>
+          <a:bodyPr/>
+          <a:lstStyle/>
+          <a:p>
+            <a:r>
+              <a:t>14/20  ·  [3 DAQIQA]</a:t>
+            </a:r>
+          </a:p>
+          <a:p/>
+          <a:p>
+            <a:r>
+              <a:t>Oddiy hisob. Mingta obyekt eng past tarifda — oyiga 149 million so'm. Bu eng past tarif; mehmonxona yoki kattaroq restoran ikki barobar to'laydi. Qurilmalar va shaxsiy raqamlar bu yerda hisobga olinmagan.</a:t>
+            </a:r>
+          </a:p>
+        </p:txBody>
+      </p:sp>
+      <p:sp>
+        <p:nvSpPr>
+          <p:cNvPr id="4" name="Slide Number Placeholder 3"/>
+          <p:cNvSpPr>
+            <a:spLocks noGrp="1"/>
+          </p:cNvSpPr>
+          <p:nvPr>
+            <p:ph type="sldNum" idx="5" sz="quarter"/>
+          </p:nvPr>
+        </p:nvSpPr>
+        <p:spPr/>
+      </p:sp>
+    </p:spTree>
+  </p:cSld>
+  <p:clrMapOvr>
+    <a:masterClrMapping/>
+  </p:clrMapOvr>
+</p:notes>
+</file>
+
+<file path=ppt/notesSlides/notesSlide15.xml><?xml version="1.0" encoding="utf-8"?>
+<p:notes xmlns:a="http://schemas.openxmlformats.org/drawingml/2006/main" xmlns:p="http://schemas.openxmlformats.org/presentationml/2006/main" xmlns:r="http://schemas.openxmlformats.org/officeDocument/2006/relationships">
+  <p:cSld>
+    <p:spTree>
+      <p:nvGrpSpPr>
+        <p:cNvPr id="1" name=""/>
+        <p:cNvGrpSpPr/>
+        <p:nvPr/>
+      </p:nvGrpSpPr>
+      <p:grpSpPr>
+        <a:xfrm>
+          <a:off x="0" y="0"/>
+          <a:ext cx="0" cy="0"/>
+          <a:chOff x="0" y="0"/>
+          <a:chExt cx="0" cy="0"/>
+        </a:xfrm>
+      </p:grpSpPr>
+      <p:sp>
+        <p:nvSpPr>
+          <p:cNvPr id="2" name="Slide Image Placeholder 1"/>
+          <p:cNvSpPr>
+            <a:spLocks noGrp="1"/>
+          </p:cNvSpPr>
+          <p:nvPr>
+            <p:ph type="sldImg" idx="2"/>
+          </p:nvPr>
+        </p:nvSpPr>
+        <p:spPr/>
+      </p:sp>
+      <p:sp>
+        <p:nvSpPr>
+          <p:cNvPr id="3" name="Notes Placeholder 2"/>
+          <p:cNvSpPr>
+            <a:spLocks noGrp="1"/>
+          </p:cNvSpPr>
+          <p:nvPr>
+            <p:ph type="body" idx="3" sz="quarter"/>
+          </p:nvPr>
+        </p:nvSpPr>
+        <p:spPr/>
+        <p:txBody>
+          <a:bodyPr/>
+          <a:lstStyle/>
+          <a:p>
+            <a:r>
+              <a:t>15/20</a:t>
+            </a:r>
+          </a:p>
+          <a:p/>
+          <a:p>
+            <a:r>
+              <a:t>Bu birinchi urinish emas. IT Park rezidentimiz, akseleratsiyalardan o'tganmiz, qurilma sotganmiz — kafe, do'kon, kiyim do'koni, shifoxona. Ishlab chiqaruvchi bilan bevosita ishlaymiz, ya'ni qurilma narxini o'zimiz boshqaramiz.</a:t>
+            </a:r>
+          </a:p>
+        </p:txBody>
+      </p:sp>
+      <p:sp>
+        <p:nvSpPr>
+          <p:cNvPr id="4" name="Slide Number Placeholder 3"/>
+          <p:cNvSpPr>
+            <a:spLocks noGrp="1"/>
+          </p:cNvSpPr>
+          <p:nvPr>
+            <p:ph type="sldNum" idx="5" sz="quarter"/>
+          </p:nvPr>
+        </p:nvSpPr>
+        <p:spPr/>
+      </p:sp>
+    </p:spTree>
+  </p:cSld>
+  <p:clrMapOvr>
+    <a:masterClrMapping/>
+  </p:clrMapOvr>
+</p:notes>
+</file>
+
+<file path=ppt/notesSlides/notesSlide16.xml><?xml version="1.0" encoding="utf-8"?>
+<p:notes xmlns:a="http://schemas.openxmlformats.org/drawingml/2006/main" xmlns:p="http://schemas.openxmlformats.org/presentationml/2006/main" xmlns:r="http://schemas.openxmlformats.org/officeDocument/2006/relationships">
+  <p:cSld>
+    <p:spTree>
+      <p:nvGrpSpPr>
+        <p:cNvPr id="1" name=""/>
+        <p:cNvGrpSpPr/>
+        <p:nvPr/>
+      </p:nvGrpSpPr>
+      <p:grpSpPr>
+        <a:xfrm>
+          <a:off x="0" y="0"/>
+          <a:ext cx="0" cy="0"/>
+          <a:chOff x="0" y="0"/>
+          <a:chExt cx="0" cy="0"/>
+        </a:xfrm>
+      </p:grpSpPr>
+      <p:sp>
+        <p:nvSpPr>
+          <p:cNvPr id="2" name="Slide Image Placeholder 1"/>
+          <p:cNvSpPr>
+            <a:spLocks noGrp="1"/>
+          </p:cNvSpPr>
+          <p:nvPr>
+            <p:ph type="sldImg" idx="2"/>
+          </p:nvPr>
+        </p:nvSpPr>
+        <p:spPr/>
+      </p:sp>
+      <p:sp>
+        <p:nvSpPr>
+          <p:cNvPr id="3" name="Notes Placeholder 2"/>
+          <p:cNvSpPr>
+            <a:spLocks noGrp="1"/>
+          </p:cNvSpPr>
+          <p:nvPr>
+            <p:ph type="body" idx="3" sz="quarter"/>
+          </p:nvPr>
+        </p:nvSpPr>
+        <p:spPr/>
+        <p:txBody>
+          <a:bodyPr/>
+          <a:lstStyle/>
+          <a:p>
+            <a:r>
+              <a:t>16/20  ·  [3 DAQIQA]</a:t>
+            </a:r>
+          </a:p>
+          <a:p/>
+          <a:p>
+            <a:r>
+              <a:t>Bu deckdagi yagona haqiqiy surat — qolgani render. Haqiqiy kafe, haqiqiy stol, ishlab turgan qurilma. Chapdagi ro'yxat — bugun ishlayotgan narsalar, kelajak rejasi emas.</a:t>
+            </a:r>
+          </a:p>
+        </p:txBody>
+      </p:sp>
+      <p:sp>
+        <p:nvSpPr>
+          <p:cNvPr id="4" name="Slide Number Placeholder 3"/>
+          <p:cNvSpPr>
+            <a:spLocks noGrp="1"/>
+          </p:cNvSpPr>
+          <p:nvPr>
+            <p:ph type="sldNum" idx="5" sz="quarter"/>
+          </p:nvPr>
+        </p:nvSpPr>
+        <p:spPr/>
+      </p:sp>
+    </p:spTree>
+  </p:cSld>
+  <p:clrMapOvr>
+    <a:masterClrMapping/>
+  </p:clrMapOvr>
+</p:notes>
+</file>
+
+<file path=ppt/notesSlides/notesSlide17.xml><?xml version="1.0" encoding="utf-8"?>
+<p:notes xmlns:a="http://schemas.openxmlformats.org/drawingml/2006/main" xmlns:p="http://schemas.openxmlformats.org/presentationml/2006/main" xmlns:r="http://schemas.openxmlformats.org/officeDocument/2006/relationships">
+  <p:cSld>
+    <p:spTree>
+      <p:nvGrpSpPr>
+        <p:cNvPr id="1" name=""/>
+        <p:cNvGrpSpPr/>
+        <p:nvPr/>
+      </p:nvGrpSpPr>
+      <p:grpSpPr>
+        <a:xfrm>
+          <a:off x="0" y="0"/>
+          <a:ext cx="0" cy="0"/>
+          <a:chOff x="0" y="0"/>
+          <a:chExt cx="0" cy="0"/>
+        </a:xfrm>
+      </p:grpSpPr>
+      <p:sp>
+        <p:nvSpPr>
+          <p:cNvPr id="2" name="Slide Image Placeholder 1"/>
+          <p:cNvSpPr>
+            <a:spLocks noGrp="1"/>
+          </p:cNvSpPr>
+          <p:nvPr>
+            <p:ph type="sldImg" idx="2"/>
+          </p:nvPr>
+        </p:nvSpPr>
+        <p:spPr/>
+      </p:sp>
+      <p:sp>
+        <p:nvSpPr>
+          <p:cNvPr id="3" name="Notes Placeholder 2"/>
+          <p:cNvSpPr>
+            <a:spLocks noGrp="1"/>
+          </p:cNvSpPr>
+          <p:nvPr>
+            <p:ph type="body" idx="3" sz="quarter"/>
+          </p:nvPr>
+        </p:nvSpPr>
+        <p:spPr/>
+        <p:txBody>
+          <a:bodyPr/>
+          <a:lstStyle/>
+          <a:p>
+            <a:r>
+              <a:t>17/20</a:t>
+            </a:r>
+          </a:p>
+          <a:p/>
+          <a:p>
+            <a:r>
+              <a:t>O'n sakkiz oy. Birinchi chorak — Payme sertifikatsiyasi va yuzta obyekt. Keyin mahsulotni kengaytirish, keyin diler tarmog'i, keyin qo'shni bozorlar. Sanalar raund yopilgandan hisoblanadi.</a:t>
+            </a:r>
+          </a:p>
+        </p:txBody>
+      </p:sp>
+      <p:sp>
+        <p:nvSpPr>
+          <p:cNvPr id="4" name="Slide Number Placeholder 3"/>
+          <p:cNvSpPr>
+            <a:spLocks noGrp="1"/>
+          </p:cNvSpPr>
+          <p:nvPr>
+            <p:ph type="sldNum" idx="5" sz="quarter"/>
+          </p:nvPr>
+        </p:nvSpPr>
+        <p:spPr/>
+      </p:sp>
+    </p:spTree>
+  </p:cSld>
+  <p:clrMapOvr>
+    <a:masterClrMapping/>
+  </p:clrMapOvr>
+</p:notes>
+</file>
+
+<file path=ppt/notesSlides/notesSlide18.xml><?xml version="1.0" encoding="utf-8"?>
+<p:notes xmlns:a="http://schemas.openxmlformats.org/drawingml/2006/main" xmlns:p="http://schemas.openxmlformats.org/presentationml/2006/main" xmlns:r="http://schemas.openxmlformats.org/officeDocument/2006/relationships">
+  <p:cSld>
+    <p:spTree>
+      <p:nvGrpSpPr>
+        <p:cNvPr id="1" name=""/>
+        <p:cNvGrpSpPr/>
+        <p:nvPr/>
+      </p:nvGrpSpPr>
+      <p:grpSpPr>
+        <a:xfrm>
+          <a:off x="0" y="0"/>
+          <a:ext cx="0" cy="0"/>
+          <a:chOff x="0" y="0"/>
+          <a:chExt cx="0" cy="0"/>
+        </a:xfrm>
+      </p:grpSpPr>
+      <p:sp>
+        <p:nvSpPr>
+          <p:cNvPr id="2" name="Slide Image Placeholder 1"/>
+          <p:cNvSpPr>
+            <a:spLocks noGrp="1"/>
+          </p:cNvSpPr>
+          <p:nvPr>
+            <p:ph type="sldImg" idx="2"/>
+          </p:nvPr>
+        </p:nvSpPr>
+        <p:spPr/>
+      </p:sp>
+      <p:sp>
+        <p:nvSpPr>
+          <p:cNvPr id="3" name="Notes Placeholder 2"/>
+          <p:cNvSpPr>
+            <a:spLocks noGrp="1"/>
+          </p:cNvSpPr>
+          <p:nvPr>
+            <p:ph type="body" idx="3" sz="quarter"/>
+          </p:nvPr>
+        </p:nvSpPr>
+        <p:spPr/>
+        <p:txBody>
+          <a:bodyPr/>
+          <a:lstStyle/>
+          <a:p>
+            <a:r>
+              <a:t>18/20</a:t>
+            </a:r>
+          </a:p>
+          <a:p/>
+          <a:p>
+            <a:r>
+              <a:t>Nega aynan hozir. Telefonlar tayyor — NFC hammasida bor, QR'ni hech kimga tushuntirish kerak emas. Kafelar narxda emas, xizmatda raqobatlashyapti. Va to'lov yo'llari paydo bo'ldi: oylik obunani bizneslardan yig'ish endi mumkin.</a:t>
+            </a:r>
+          </a:p>
+        </p:txBody>
+      </p:sp>
+      <p:sp>
+        <p:nvSpPr>
+          <p:cNvPr id="4" name="Slide Number Placeholder 3"/>
+          <p:cNvSpPr>
+            <a:spLocks noGrp="1"/>
+          </p:cNvSpPr>
+          <p:nvPr>
+            <p:ph type="sldNum" idx="5" sz="quarter"/>
+          </p:nvPr>
+        </p:nvSpPr>
+        <p:spPr/>
+      </p:sp>
+    </p:spTree>
+  </p:cSld>
+  <p:clrMapOvr>
+    <a:masterClrMapping/>
+  </p:clrMapOvr>
+</p:notes>
+</file>
+
+<file path=ppt/notesSlides/notesSlide19.xml><?xml version="1.0" encoding="utf-8"?>
+<p:notes xmlns:a="http://schemas.openxmlformats.org/drawingml/2006/main" xmlns:p="http://schemas.openxmlformats.org/presentationml/2006/main" xmlns:r="http://schemas.openxmlformats.org/officeDocument/2006/relationships">
+  <p:cSld>
+    <p:spTree>
+      <p:nvGrpSpPr>
+        <p:cNvPr id="1" name=""/>
+        <p:cNvGrpSpPr/>
+        <p:nvPr/>
+      </p:nvGrpSpPr>
+      <p:grpSpPr>
+        <a:xfrm>
+          <a:off x="0" y="0"/>
+          <a:ext cx="0" cy="0"/>
+          <a:chOff x="0" y="0"/>
+          <a:chExt cx="0" cy="0"/>
+        </a:xfrm>
+      </p:grpSpPr>
+      <p:sp>
+        <p:nvSpPr>
+          <p:cNvPr id="2" name="Slide Image Placeholder 1"/>
+          <p:cNvSpPr>
+            <a:spLocks noGrp="1"/>
+          </p:cNvSpPr>
+          <p:nvPr>
+            <p:ph type="sldImg" idx="2"/>
+          </p:nvPr>
+        </p:nvSpPr>
+        <p:spPr/>
+      </p:sp>
+      <p:sp>
+        <p:nvSpPr>
+          <p:cNvPr id="3" name="Notes Placeholder 2"/>
+          <p:cNvSpPr>
+            <a:spLocks noGrp="1"/>
+          </p:cNvSpPr>
+          <p:nvPr>
+            <p:ph type="body" idx="3" sz="quarter"/>
+          </p:nvPr>
+        </p:nvSpPr>
+        <p:spPr/>
+        <p:txBody>
+          <a:bodyPr/>
+          <a:lstStyle/>
+          <a:p>
+            <a:r>
+              <a:t>19/20</a:t>
+            </a:r>
+          </a:p>
+          <a:p/>
+          <a:p>
+            <a:r>
+              <a:t>Uch kishi. Mahsulot, veb va sotuv — hammasi ichkarida. Birinchi versiya tashqi jamoasiz qurildi va bugun ishlab turibdi.</a:t>
+            </a:r>
+          </a:p>
+        </p:txBody>
+      </p:sp>
+      <p:sp>
+        <p:nvSpPr>
+          <p:cNvPr id="4" name="Slide Number Placeholder 3"/>
+          <p:cNvSpPr>
+            <a:spLocks noGrp="1"/>
+          </p:cNvSpPr>
+          <p:nvPr>
+            <p:ph type="sldNum" idx="5" sz="quarter"/>
+          </p:nvPr>
+        </p:nvSpPr>
+        <p:spPr/>
+      </p:sp>
+    </p:spTree>
+  </p:cSld>
+  <p:clrMapOvr>
+    <a:masterClrMapping/>
+  </p:clrMapOvr>
+</p:notes>
+</file>
+
+<file path=ppt/notesSlides/notesSlide2.xml><?xml version="1.0" encoding="utf-8"?>
+<p:notes xmlns:a="http://schemas.openxmlformats.org/drawingml/2006/main" xmlns:p="http://schemas.openxmlformats.org/presentationml/2006/main" xmlns:r="http://schemas.openxmlformats.org/officeDocument/2006/relationships">
+  <p:cSld>
+    <p:spTree>
+      <p:nvGrpSpPr>
+        <p:cNvPr id="1" name=""/>
+        <p:cNvGrpSpPr/>
+        <p:nvPr/>
+      </p:nvGrpSpPr>
+      <p:grpSpPr>
+        <a:xfrm>
+          <a:off x="0" y="0"/>
+          <a:ext cx="0" cy="0"/>
+          <a:chOff x="0" y="0"/>
+          <a:chExt cx="0" cy="0"/>
+        </a:xfrm>
+      </p:grpSpPr>
+      <p:sp>
+        <p:nvSpPr>
+          <p:cNvPr id="2" name="Slide Image Placeholder 1"/>
+          <p:cNvSpPr>
+            <a:spLocks noGrp="1"/>
+          </p:cNvSpPr>
+          <p:nvPr>
+            <p:ph type="sldImg" idx="2"/>
+          </p:nvPr>
+        </p:nvSpPr>
+        <p:spPr/>
+      </p:sp>
+      <p:sp>
+        <p:nvSpPr>
+          <p:cNvPr id="3" name="Notes Placeholder 2"/>
+          <p:cNvSpPr>
+            <a:spLocks noGrp="1"/>
+          </p:cNvSpPr>
+          <p:nvPr>
+            <p:ph type="body" idx="3" sz="quarter"/>
+          </p:nvPr>
+        </p:nvSpPr>
+        <p:spPr/>
+        <p:txBody>
+          <a:bodyPr/>
+          <a:lstStyle/>
+          <a:p>
+            <a:r>
+              <a:t>2/20  ·  [3 DAQIQA]</a:t>
+            </a:r>
+          </a:p>
+          <a:p/>
+          <a:p>
+            <a:r>
+              <a:t>Sakkizta holat. Hammasi bitta sababdan: qog'oz bir marta bosiladi, hayot esa o'zgaraveradi. Vizitkadagi raqam o'zgaradi, menyudagi narx ko'tariladi, mashina oynasida raqam umuman yo'q. Bu ro'yxat bizning xayolimizdan chiqmagan — har birini mijoz o'zi aytgan.</a:t>
+            </a:r>
+          </a:p>
+        </p:txBody>
+      </p:sp>
+      <p:sp>
+        <p:nvSpPr>
+          <p:cNvPr id="4" name="Slide Number Placeholder 3"/>
+          <p:cNvSpPr>
+            <a:spLocks noGrp="1"/>
+          </p:cNvSpPr>
+          <p:nvPr>
+            <p:ph type="sldNum" idx="5" sz="quarter"/>
+          </p:nvPr>
+        </p:nvSpPr>
+        <p:spPr/>
+      </p:sp>
+    </p:spTree>
+  </p:cSld>
+  <p:clrMapOvr>
+    <a:masterClrMapping/>
+  </p:clrMapOvr>
+</p:notes>
+</file>
+
+<file path=ppt/notesSlides/notesSlide20.xml><?xml version="1.0" encoding="utf-8"?>
+<p:notes xmlns:a="http://schemas.openxmlformats.org/drawingml/2006/main" xmlns:p="http://schemas.openxmlformats.org/presentationml/2006/main" xmlns:r="http://schemas.openxmlformats.org/officeDocument/2006/relationships">
+  <p:cSld>
+    <p:spTree>
+      <p:nvGrpSpPr>
+        <p:cNvPr id="1" name=""/>
+        <p:cNvGrpSpPr/>
+        <p:nvPr/>
+      </p:nvGrpSpPr>
+      <p:grpSpPr>
+        <a:xfrm>
+          <a:off x="0" y="0"/>
+          <a:ext cx="0" cy="0"/>
+          <a:chOff x="0" y="0"/>
+          <a:chExt cx="0" cy="0"/>
+        </a:xfrm>
+      </p:grpSpPr>
+      <p:sp>
+        <p:nvSpPr>
+          <p:cNvPr id="2" name="Slide Image Placeholder 1"/>
+          <p:cNvSpPr>
+            <a:spLocks noGrp="1"/>
+          </p:cNvSpPr>
+          <p:nvPr>
+            <p:ph type="sldImg" idx="2"/>
+          </p:nvPr>
+        </p:nvSpPr>
+        <p:spPr/>
+      </p:sp>
+      <p:sp>
+        <p:nvSpPr>
+          <p:cNvPr id="3" name="Notes Placeholder 2"/>
+          <p:cNvSpPr>
+            <a:spLocks noGrp="1"/>
+          </p:cNvSpPr>
+          <p:nvPr>
+            <p:ph type="body" idx="3" sz="quarter"/>
+          </p:nvPr>
+        </p:nvSpPr>
+        <p:spPr/>
+        <p:txBody>
+          <a:bodyPr/>
+          <a:lstStyle/>
+          <a:p>
+            <a:r>
+              <a:t>20/20  ·  [3 DAQIQA]</a:t>
+            </a:r>
+          </a:p>
+          <a:p/>
+          <a:p>
+            <a:r>
+              <a:t>Pre-seed bosqichida 50 dan 100 minggacha dollar. Yarmidan ko'pi qurilmalar zaxirasi va birinchi yuzta obyektni o'rnatishga ketadi — ya'ni mahsulotga emas, sotuvga. Mahsulot allaqachon qurilgan. Rahmat.</a:t>
+            </a:r>
+          </a:p>
+        </p:txBody>
+      </p:sp>
+      <p:sp>
+        <p:nvSpPr>
+          <p:cNvPr id="4" name="Slide Number Placeholder 3"/>
+          <p:cNvSpPr>
+            <a:spLocks noGrp="1"/>
+          </p:cNvSpPr>
+          <p:nvPr>
+            <p:ph type="sldNum" idx="5" sz="quarter"/>
+          </p:nvPr>
+        </p:nvSpPr>
+        <p:spPr/>
+      </p:sp>
+    </p:spTree>
+  </p:cSld>
+  <p:clrMapOvr>
+    <a:masterClrMapping/>
+  </p:clrMapOvr>
+</p:notes>
+</file>
+
+<file path=ppt/notesSlides/notesSlide3.xml><?xml version="1.0" encoding="utf-8"?>
+<p:notes xmlns:a="http://schemas.openxmlformats.org/drawingml/2006/main" xmlns:p="http://schemas.openxmlformats.org/presentationml/2006/main" xmlns:r="http://schemas.openxmlformats.org/officeDocument/2006/relationships">
+  <p:cSld>
+    <p:spTree>
+      <p:nvGrpSpPr>
+        <p:cNvPr id="1" name=""/>
+        <p:cNvGrpSpPr/>
+        <p:nvPr/>
+      </p:nvGrpSpPr>
+      <p:grpSpPr>
+        <a:xfrm>
+          <a:off x="0" y="0"/>
+          <a:ext cx="0" cy="0"/>
+          <a:chOff x="0" y="0"/>
+          <a:chExt cx="0" cy="0"/>
+        </a:xfrm>
+      </p:grpSpPr>
+      <p:sp>
+        <p:nvSpPr>
+          <p:cNvPr id="2" name="Slide Image Placeholder 1"/>
+          <p:cNvSpPr>
+            <a:spLocks noGrp="1"/>
+          </p:cNvSpPr>
+          <p:nvPr>
+            <p:ph type="sldImg" idx="2"/>
+          </p:nvPr>
+        </p:nvSpPr>
+        <p:spPr/>
+      </p:sp>
+      <p:sp>
+        <p:nvSpPr>
+          <p:cNvPr id="3" name="Notes Placeholder 2"/>
+          <p:cNvSpPr>
+            <a:spLocks noGrp="1"/>
+          </p:cNvSpPr>
+          <p:nvPr>
+            <p:ph type="body" idx="3" sz="quarter"/>
+          </p:nvPr>
+        </p:nvSpPr>
+        <p:spPr/>
+        <p:txBody>
+          <a:bodyPr/>
+          <a:lstStyle/>
+          <a:p>
+            <a:r>
+              <a:t>3/20</a:t>
+            </a:r>
+          </a:p>
+          <a:p/>
+          <a:p>
+            <a:r>
+              <a:t>Yechim bitta mexanizm. Tegiziladi — sahifa ochiladi. Ilova o'rnatilmaydi, ro'yxatdan o'tilmaydi, hech kim hech narsa yuklab olmaydi. Bu jumla butun mahsulotni tushuntiradi.</a:t>
+            </a:r>
+          </a:p>
+        </p:txBody>
+      </p:sp>
+      <p:sp>
+        <p:nvSpPr>
+          <p:cNvPr id="4" name="Slide Number Placeholder 3"/>
+          <p:cNvSpPr>
+            <a:spLocks noGrp="1"/>
+          </p:cNvSpPr>
+          <p:nvPr>
+            <p:ph type="sldNum" idx="5" sz="quarter"/>
+          </p:nvPr>
+        </p:nvSpPr>
+        <p:spPr/>
+      </p:sp>
+    </p:spTree>
+  </p:cSld>
+  <p:clrMapOvr>
+    <a:masterClrMapping/>
+  </p:clrMapOvr>
+</p:notes>
+</file>
+
+<file path=ppt/notesSlides/notesSlide4.xml><?xml version="1.0" encoding="utf-8"?>
+<p:notes xmlns:a="http://schemas.openxmlformats.org/drawingml/2006/main" xmlns:p="http://schemas.openxmlformats.org/presentationml/2006/main" xmlns:r="http://schemas.openxmlformats.org/officeDocument/2006/relationships">
+  <p:cSld>
+    <p:spTree>
+      <p:nvGrpSpPr>
+        <p:cNvPr id="1" name=""/>
+        <p:cNvGrpSpPr/>
+        <p:nvPr/>
+      </p:nvGrpSpPr>
+      <p:grpSpPr>
+        <a:xfrm>
+          <a:off x="0" y="0"/>
+          <a:ext cx="0" cy="0"/>
+          <a:chOff x="0" y="0"/>
+          <a:chExt cx="0" cy="0"/>
+        </a:xfrm>
+      </p:grpSpPr>
+      <p:sp>
+        <p:nvSpPr>
+          <p:cNvPr id="2" name="Slide Image Placeholder 1"/>
+          <p:cNvSpPr>
+            <a:spLocks noGrp="1"/>
+          </p:cNvSpPr>
+          <p:nvPr>
+            <p:ph type="sldImg" idx="2"/>
+          </p:nvPr>
+        </p:nvSpPr>
+        <p:spPr/>
+      </p:sp>
+      <p:sp>
+        <p:nvSpPr>
+          <p:cNvPr id="3" name="Notes Placeholder 2"/>
+          <p:cNvSpPr>
+            <a:spLocks noGrp="1"/>
+          </p:cNvSpPr>
+          <p:nvPr>
+            <p:ph type="body" idx="3" sz="quarter"/>
+          </p:nvPr>
+        </p:nvSpPr>
+        <p:spPr/>
+        <p:txBody>
+          <a:bodyPr/>
+          <a:lstStyle/>
+          <a:p>
+            <a:r>
+              <a:t>4/20  ·  [3 DAQIQA]</a:t>
+            </a:r>
+          </a:p>
+          <a:p/>
+          <a:p>
+            <a:r>
+              <a:t>Chapda o'sha sakkizta muammo, o'ngda javobi. Diqqat qiling: bittasi ham kelajakda qiladigan ish emas — hammasi bugun ishlaydi. Biz muammoni sanab, keyin bitta yechim ko'rsatmayapmiz; bitta mexanizm sakkiz joyda ishlaydi.</a:t>
+            </a:r>
+          </a:p>
+        </p:txBody>
+      </p:sp>
+      <p:sp>
+        <p:nvSpPr>
+          <p:cNvPr id="4" name="Slide Number Placeholder 3"/>
+          <p:cNvSpPr>
+            <a:spLocks noGrp="1"/>
+          </p:cNvSpPr>
+          <p:nvPr>
+            <p:ph type="sldNum" idx="5" sz="quarter"/>
+          </p:nvPr>
+        </p:nvSpPr>
+        <p:spPr/>
+      </p:sp>
+    </p:spTree>
+  </p:cSld>
+  <p:clrMapOvr>
+    <a:masterClrMapping/>
+  </p:clrMapOvr>
+</p:notes>
+</file>
+
+<file path=ppt/notesSlides/notesSlide5.xml><?xml version="1.0" encoding="utf-8"?>
+<p:notes xmlns:a="http://schemas.openxmlformats.org/drawingml/2006/main" xmlns:p="http://schemas.openxmlformats.org/presentationml/2006/main" xmlns:r="http://schemas.openxmlformats.org/officeDocument/2006/relationships">
+  <p:cSld>
+    <p:spTree>
+      <p:nvGrpSpPr>
+        <p:cNvPr id="1" name=""/>
+        <p:cNvGrpSpPr/>
+        <p:nvPr/>
+      </p:nvGrpSpPr>
+      <p:grpSpPr>
+        <a:xfrm>
+          <a:off x="0" y="0"/>
+          <a:ext cx="0" cy="0"/>
+          <a:chOff x="0" y="0"/>
+          <a:chExt cx="0" cy="0"/>
+        </a:xfrm>
+      </p:grpSpPr>
+      <p:sp>
+        <p:nvSpPr>
+          <p:cNvPr id="2" name="Slide Image Placeholder 1"/>
+          <p:cNvSpPr>
+            <a:spLocks noGrp="1"/>
+          </p:cNvSpPr>
+          <p:nvPr>
+            <p:ph type="sldImg" idx="2"/>
+          </p:nvPr>
+        </p:nvSpPr>
+        <p:spPr/>
+      </p:sp>
+      <p:sp>
+        <p:nvSpPr>
+          <p:cNvPr id="3" name="Notes Placeholder 2"/>
+          <p:cNvSpPr>
+            <a:spLocks noGrp="1"/>
+          </p:cNvSpPr>
+          <p:nvPr>
+            <p:ph type="body" idx="3" sz="quarter"/>
+          </p:nvPr>
+        </p:nvSpPr>
+        <p:spPr/>
+        <p:txBody>
+          <a:bodyPr/>
+          <a:lstStyle/>
+          <a:p>
+            <a:r>
+              <a:t>5/20</a:t>
+            </a:r>
+          </a:p>
+          <a:p/>
+          <a:p>
+            <a:r>
+              <a:t>Bu qo'lga olinadigan qism. Sakkizta shakl, bitta tizim. Karta, uzuk va braslet — bir martalik savdo. Pastdagi to'rttasi obyektga ketadi va obuna bilan keladi. Narxlar oynada.</a:t>
+            </a:r>
+          </a:p>
+        </p:txBody>
+      </p:sp>
+      <p:sp>
+        <p:nvSpPr>
+          <p:cNvPr id="4" name="Slide Number Placeholder 3"/>
+          <p:cNvSpPr>
+            <a:spLocks noGrp="1"/>
+          </p:cNvSpPr>
+          <p:nvPr>
+            <p:ph type="sldNum" idx="5" sz="quarter"/>
+          </p:nvPr>
+        </p:nvSpPr>
+        <p:spPr/>
+      </p:sp>
+    </p:spTree>
+  </p:cSld>
+  <p:clrMapOvr>
+    <a:masterClrMapping/>
+  </p:clrMapOvr>
+</p:notes>
+</file>
+
+<file path=ppt/notesSlides/notesSlide6.xml><?xml version="1.0" encoding="utf-8"?>
+<p:notes xmlns:a="http://schemas.openxmlformats.org/drawingml/2006/main" xmlns:p="http://schemas.openxmlformats.org/presentationml/2006/main" xmlns:r="http://schemas.openxmlformats.org/officeDocument/2006/relationships">
+  <p:cSld>
+    <p:spTree>
+      <p:nvGrpSpPr>
+        <p:cNvPr id="1" name=""/>
+        <p:cNvGrpSpPr/>
+        <p:nvPr/>
+      </p:nvGrpSpPr>
+      <p:grpSpPr>
+        <a:xfrm>
+          <a:off x="0" y="0"/>
+          <a:ext cx="0" cy="0"/>
+          <a:chOff x="0" y="0"/>
+          <a:chExt cx="0" cy="0"/>
+        </a:xfrm>
+      </p:grpSpPr>
+      <p:sp>
+        <p:nvSpPr>
+          <p:cNvPr id="2" name="Slide Image Placeholder 1"/>
+          <p:cNvSpPr>
+            <a:spLocks noGrp="1"/>
+          </p:cNvSpPr>
+          <p:nvPr>
+            <p:ph type="sldImg" idx="2"/>
+          </p:nvPr>
+        </p:nvSpPr>
+        <p:spPr/>
+      </p:sp>
+      <p:sp>
+        <p:nvSpPr>
+          <p:cNvPr id="3" name="Notes Placeholder 2"/>
+          <p:cNvSpPr>
+            <a:spLocks noGrp="1"/>
+          </p:cNvSpPr>
+          <p:nvPr>
+            <p:ph type="body" idx="3" sz="quarter"/>
+          </p:nvPr>
+        </p:nvSpPr>
+        <p:spPr/>
+        <p:txBody>
+          <a:bodyPr/>
+          <a:lstStyle/>
+          <a:p>
+            <a:r>
+              <a:t>6/20  ·  [3 DAQIQA]</a:t>
+            </a:r>
+          </a:p>
+          <a:p/>
+          <a:p>
+            <a:r>
+              <a:t>Bizga eng ko'p beriladigan savol: NFC karta hammada bor, farqingiz nima. Farq kartada emas. Raqam mijozning o'ziga tegishli, sahifa istalgan payt o'zgaradi, statistika bor, uch til bor, Payme ulangan, va eng muhimi — obyekt qatlami bor. Karta bir bo'lak temir; qolgani platforma.</a:t>
+            </a:r>
+          </a:p>
+        </p:txBody>
+      </p:sp>
+      <p:sp>
+        <p:nvSpPr>
+          <p:cNvPr id="4" name="Slide Number Placeholder 3"/>
+          <p:cNvSpPr>
+            <a:spLocks noGrp="1"/>
+          </p:cNvSpPr>
+          <p:nvPr>
+            <p:ph type="sldNum" idx="5" sz="quarter"/>
+          </p:nvPr>
+        </p:nvSpPr>
+        <p:spPr/>
+      </p:sp>
+    </p:spTree>
+  </p:cSld>
+  <p:clrMapOvr>
+    <a:masterClrMapping/>
+  </p:clrMapOvr>
+</p:notes>
+</file>
+
+<file path=ppt/notesSlides/notesSlide7.xml><?xml version="1.0" encoding="utf-8"?>
+<p:notes xmlns:a="http://schemas.openxmlformats.org/drawingml/2006/main" xmlns:p="http://schemas.openxmlformats.org/presentationml/2006/main" xmlns:r="http://schemas.openxmlformats.org/officeDocument/2006/relationships">
+  <p:cSld>
+    <p:spTree>
+      <p:nvGrpSpPr>
+        <p:cNvPr id="1" name=""/>
+        <p:cNvGrpSpPr/>
+        <p:nvPr/>
+      </p:nvGrpSpPr>
+      <p:grpSpPr>
+        <a:xfrm>
+          <a:off x="0" y="0"/>
+          <a:ext cx="0" cy="0"/>
+          <a:chOff x="0" y="0"/>
+          <a:chExt cx="0" cy="0"/>
+        </a:xfrm>
+      </p:grpSpPr>
+      <p:sp>
+        <p:nvSpPr>
+          <p:cNvPr id="2" name="Slide Image Placeholder 1"/>
+          <p:cNvSpPr>
+            <a:spLocks noGrp="1"/>
+          </p:cNvSpPr>
+          <p:nvPr>
+            <p:ph type="sldImg" idx="2"/>
+          </p:nvPr>
+        </p:nvSpPr>
+        <p:spPr/>
+      </p:sp>
+      <p:sp>
+        <p:nvSpPr>
+          <p:cNvPr id="3" name="Notes Placeholder 2"/>
+          <p:cNvSpPr>
+            <a:spLocks noGrp="1"/>
+          </p:cNvSpPr>
+          <p:nvPr>
+            <p:ph type="body" idx="3" sz="quarter"/>
+          </p:nvPr>
+        </p:nvSpPr>
+        <p:spPr/>
+        <p:txBody>
+          <a:bodyPr/>
+          <a:lstStyle/>
+          <a:p>
+            <a:r>
+              <a:t>7/20</a:t>
+            </a:r>
+          </a:p>
+          <a:p/>
+          <a:p>
+            <a:r>
+              <a:t>Dizaynlarni o'zimiz chizganmiz. Raqobatchi mashina yoki multfilm logotipini bosadi — bu tovar belgisini buzish va uni har kim takrorlashi mumkin. Past raqamli seriyani esa hech kim takrorlay olmaydi. Bundan tashqari xaridor bir gap yozib, dizaynni sun'iy intellektga chizdiradi.</a:t>
+            </a:r>
+          </a:p>
+        </p:txBody>
+      </p:sp>
+      <p:sp>
+        <p:nvSpPr>
+          <p:cNvPr id="4" name="Slide Number Placeholder 3"/>
+          <p:cNvSpPr>
+            <a:spLocks noGrp="1"/>
+          </p:cNvSpPr>
+          <p:nvPr>
+            <p:ph type="sldNum" idx="5" sz="quarter"/>
+          </p:nvPr>
+        </p:nvSpPr>
+        <p:spPr/>
+      </p:sp>
+    </p:spTree>
+  </p:cSld>
+  <p:clrMapOvr>
+    <a:masterClrMapping/>
+  </p:clrMapOvr>
+</p:notes>
+</file>
+
+<file path=ppt/notesSlides/notesSlide8.xml><?xml version="1.0" encoding="utf-8"?>
+<p:notes xmlns:a="http://schemas.openxmlformats.org/drawingml/2006/main" xmlns:p="http://schemas.openxmlformats.org/presentationml/2006/main" xmlns:r="http://schemas.openxmlformats.org/officeDocument/2006/relationships">
+  <p:cSld>
+    <p:spTree>
+      <p:nvGrpSpPr>
+        <p:cNvPr id="1" name=""/>
+        <p:cNvGrpSpPr/>
+        <p:nvPr/>
+      </p:nvGrpSpPr>
+      <p:grpSpPr>
+        <a:xfrm>
+          <a:off x="0" y="0"/>
+          <a:ext cx="0" cy="0"/>
+          <a:chOff x="0" y="0"/>
+          <a:chExt cx="0" cy="0"/>
+        </a:xfrm>
+      </p:grpSpPr>
+      <p:sp>
+        <p:nvSpPr>
+          <p:cNvPr id="2" name="Slide Image Placeholder 1"/>
+          <p:cNvSpPr>
+            <a:spLocks noGrp="1"/>
+          </p:cNvSpPr>
+          <p:nvPr>
+            <p:ph type="sldImg" idx="2"/>
+          </p:nvPr>
+        </p:nvSpPr>
+        <p:spPr/>
+      </p:sp>
+      <p:sp>
+        <p:nvSpPr>
+          <p:cNvPr id="3" name="Notes Placeholder 2"/>
+          <p:cNvSpPr>
+            <a:spLocks noGrp="1"/>
+          </p:cNvSpPr>
+          <p:nvPr>
+            <p:ph type="body" idx="3" sz="quarter"/>
+          </p:nvPr>
+        </p:nvSpPr>
+        <p:spPr/>
+        <p:txBody>
+          <a:bodyPr/>
+          <a:lstStyle/>
+          <a:p>
+            <a:r>
+              <a:t>8/20</a:t>
+            </a:r>
+          </a:p>
+          <a:p/>
+          <a:p>
+            <a:r>
+              <a:t>Biz sotadigan xonalar. Kafe, mehmonxona, do'kon va salon, klinika. Suratlar mokap emas — bularning hammasi o'rnatilgan qurilma.</a:t>
+            </a:r>
+          </a:p>
+        </p:txBody>
+      </p:sp>
+      <p:sp>
+        <p:nvSpPr>
+          <p:cNvPr id="4" name="Slide Number Placeholder 3"/>
+          <p:cNvSpPr>
+            <a:spLocks noGrp="1"/>
+          </p:cNvSpPr>
+          <p:nvPr>
+            <p:ph type="sldNum" idx="5" sz="quarter"/>
+          </p:nvPr>
+        </p:nvSpPr>
+        <p:spPr/>
+      </p:sp>
+    </p:spTree>
+  </p:cSld>
+  <p:clrMapOvr>
+    <a:masterClrMapping/>
+  </p:clrMapOvr>
+</p:notes>
+</file>
+
+<file path=ppt/notesSlides/notesSlide9.xml><?xml version="1.0" encoding="utf-8"?>
+<p:notes xmlns:a="http://schemas.openxmlformats.org/drawingml/2006/main" xmlns:p="http://schemas.openxmlformats.org/presentationml/2006/main" xmlns:r="http://schemas.openxmlformats.org/officeDocument/2006/relationships">
+  <p:cSld>
+    <p:spTree>
+      <p:nvGrpSpPr>
+        <p:cNvPr id="1" name=""/>
+        <p:cNvGrpSpPr/>
+        <p:nvPr/>
+      </p:nvGrpSpPr>
+      <p:grpSpPr>
+        <a:xfrm>
+          <a:off x="0" y="0"/>
+          <a:ext cx="0" cy="0"/>
+          <a:chOff x="0" y="0"/>
+          <a:chExt cx="0" cy="0"/>
+        </a:xfrm>
+      </p:grpSpPr>
+      <p:sp>
+        <p:nvSpPr>
+          <p:cNvPr id="2" name="Slide Image Placeholder 1"/>
+          <p:cNvSpPr>
+            <a:spLocks noGrp="1"/>
+          </p:cNvSpPr>
+          <p:nvPr>
+            <p:ph type="sldImg" idx="2"/>
+          </p:nvPr>
+        </p:nvSpPr>
+        <p:spPr/>
+      </p:sp>
+      <p:sp>
+        <p:nvSpPr>
+          <p:cNvPr id="3" name="Notes Placeholder 2"/>
+          <p:cNvSpPr>
+            <a:spLocks noGrp="1"/>
+          </p:cNvSpPr>
+          <p:nvPr>
+            <p:ph type="body" idx="3" sz="quarter"/>
+          </p:nvPr>
+        </p:nvSpPr>
+        <p:spPr/>
+        <p:txBody>
+          <a:bodyPr/>
+          <a:lstStyle/>
+          <a:p>
+            <a:r>
+              <a:t>9/20  ·  [3 DAQIQA]</a:t>
+            </a:r>
+          </a:p>
+          <a:p/>
+          <a:p>
+            <a:r>
+              <a:t>Raqamlar Statistika qo'mitasidan, sanasi bilan — zaldan tekshirsangiz bo'ladi. Jami 116 900 obyekt. Eng past tarifda yiliga 209 mlrd so'm. Uch yillik maqsadimiz shundan 0,9 foizi. Ya'ni biz bozorni egallash haqida gapirmayapmiz — mingta obyekt haqida gapiryapmiz.</a:t>
+            </a:r>
+          </a:p>
+        </p:txBody>
+      </p:sp>
+      <p:sp>
+        <p:nvSpPr>
+          <p:cNvPr id="4" name="Slide Number Placeholder 3"/>
+          <p:cNvSpPr>
+            <a:spLocks noGrp="1"/>
+          </p:cNvSpPr>
+          <p:nvPr>
+            <p:ph type="sldNum" idx="5" sz="quarter"/>
+          </p:nvPr>
+        </p:nvSpPr>
+        <p:spPr/>
+      </p:sp>
+    </p:spTree>
+  </p:cSld>
+  <p:clrMapOvr>
+    <a:masterClrMapping/>
+  </p:clrMapOvr>
+</p:notes>
 </file>
 
 <file path=ppt/slideLayouts/slideLayout1.xml><?xml version="1.0" encoding="utf-8"?>
@@ -25631,4 +27501,324 @@
   </a:objectDefaults>
   <a:extraClrSchemeLst/>
 </a:theme>
+</file>
+
+<file path=ppt/theme/theme2.xml><?xml version="1.0" encoding="utf-8"?>
+<a:theme xmlns:a="http://schemas.openxmlformats.org/drawingml/2006/main" name="Office Theme">
+  <a:themeElements>
+    <a:clrScheme name="Office">
+      <a:dk1>
+        <a:sysClr val="windowText" lastClr="000000"/>
+      </a:dk1>
+      <a:lt1>
+        <a:sysClr val="window" lastClr="FFFFFF"/>
+      </a:lt1>
+      <a:dk2>
+        <a:srgbClr val="1F497D"/>
+      </a:dk2>
+      <a:lt2>
+        <a:srgbClr val="EEECE1"/>
+      </a:lt2>
+      <a:accent1>
+        <a:srgbClr val="4F81BD"/>
+      </a:accent1>
+      <a:accent2>
+        <a:srgbClr val="C0504D"/>
+      </a:accent2>
+      <a:accent3>
+        <a:srgbClr val="9BBB59"/>
+      </a:accent3>
+      <a:accent4>
+        <a:srgbClr val="8064A2"/>
+      </a:accent4>
+      <a:accent5>
+        <a:srgbClr val="4BACC6"/>
+      </a:accent5>
+      <a:accent6>
+        <a:srgbClr val="F79646"/>
+      </a:accent6>
+      <a:hlink>
+        <a:srgbClr val="0000FF"/>
+      </a:hlink>
+      <a:folHlink>
+        <a:srgbClr val="800080"/>
+      </a:folHlink>
+    </a:clrScheme>
+    <a:fontScheme name="Office">
+      <a:majorFont>
+        <a:latin typeface="Calibri"/>
+        <a:ea typeface=""/>
+        <a:cs typeface=""/>
+        <a:font script="Jpan" typeface="ＭＳ Ｐゴシック"/>
+        <a:font script="Hang" typeface="맑은 고딕"/>
+        <a:font script="Hans" typeface="宋体"/>
+        <a:font script="Hant" typeface="新細明體"/>
+        <a:font script="Arab" typeface="Times New Roman"/>
+        <a:font script="Hebr" typeface="Times New Roman"/>
+        <a:font script="Thai" typeface="Angsana New"/>
+        <a:font script="Ethi" typeface="Nyala"/>
+        <a:font script="Beng" typeface="Vrinda"/>
+        <a:font script="Gujr" typeface="Shruti"/>
+        <a:font script="Khmr" typeface="MoolBoran"/>
+        <a:font script="Knda" typeface="Tunga"/>
+        <a:font script="Guru" typeface="Raavi"/>
+        <a:font script="Cans" typeface="Euphemia"/>
+        <a:font script="Cher" typeface="Plantagenet Cherokee"/>
+        <a:font script="Yiii" typeface="Microsoft Yi Baiti"/>
+        <a:font script="Tibt" typeface="Microsoft Himalaya"/>
+        <a:font script="Thaa" typeface="MV Boli"/>
+        <a:font script="Deva" typeface="Mangal"/>
+        <a:font script="Telu" typeface="Gautami"/>
+        <a:font script="Taml" typeface="Latha"/>
+        <a:font script="Syrc" typeface="Estrangelo Edessa"/>
+        <a:font script="Orya" typeface="Kalinga"/>
+        <a:font script="Mlym" typeface="Kartika"/>
+        <a:font script="Laoo" typeface="DokChampa"/>
+        <a:font script="Sinh" typeface="Iskoola Pota"/>
+        <a:font script="Mong" typeface="Mongolian Baiti"/>
+        <a:font script="Viet" typeface="Times New Roman"/>
+        <a:font script="Uigh" typeface="Microsoft Uighur"/>
+        <a:font script="Geor" typeface="Sylfaen"/>
+      </a:majorFont>
+      <a:minorFont>
+        <a:latin typeface="Calibri"/>
+        <a:ea typeface=""/>
+        <a:cs typeface=""/>
+        <a:font script="Jpan" typeface="ＭＳ Ｐゴシック"/>
+        <a:font script="Hang" typeface="맑은 고딕"/>
+        <a:font script="Hans" typeface="宋体"/>
+        <a:font script="Hant" typeface="新細明體"/>
+        <a:font script="Arab" typeface="Arial"/>
+        <a:font script="Hebr" typeface="Arial"/>
+        <a:font script="Thai" typeface="Cordia New"/>
+        <a:font script="Ethi" typeface="Nyala"/>
+        <a:font script="Beng" typeface="Vrinda"/>
+        <a:font script="Gujr" typeface="Shruti"/>
+        <a:font script="Khmr" typeface="DaunPenh"/>
+        <a:font script="Knda" typeface="Tunga"/>
+        <a:font script="Guru" typeface="Raavi"/>
+        <a:font script="Cans" typeface="Euphemia"/>
+        <a:font script="Cher" typeface="Plantagenet Cherokee"/>
+        <a:font script="Yiii" typeface="Microsoft Yi Baiti"/>
+        <a:font script="Tibt" typeface="Microsoft Himalaya"/>
+        <a:font script="Thaa" typeface="MV Boli"/>
+        <a:font script="Deva" typeface="Mangal"/>
+        <a:font script="Telu" typeface="Gautami"/>
+        <a:font script="Taml" typeface="Latha"/>
+        <a:font script="Syrc" typeface="Estrangelo Edessa"/>
+        <a:font script="Orya" typeface="Kalinga"/>
+        <a:font script="Mlym" typeface="Kartika"/>
+        <a:font script="Laoo" typeface="DokChampa"/>
+        <a:font script="Sinh" typeface="Iskoola Pota"/>
+        <a:font script="Mong" typeface="Mongolian Baiti"/>
+        <a:font script="Viet" typeface="Arial"/>
+        <a:font script="Uigh" typeface="Microsoft Uighur"/>
+        <a:font script="Geor" typeface="Sylfaen"/>
+      </a:minorFont>
+    </a:fontScheme>
+    <a:fmtScheme name="Office">
+      <a:fillStyleLst>
+        <a:solidFill>
+          <a:schemeClr val="phClr"/>
+        </a:solidFill>
+        <a:gradFill rotWithShape="1">
+          <a:gsLst>
+            <a:gs pos="0">
+              <a:schemeClr val="phClr">
+                <a:tint val="50000"/>
+                <a:satMod val="300000"/>
+              </a:schemeClr>
+            </a:gs>
+            <a:gs pos="35000">
+              <a:schemeClr val="phClr">
+                <a:tint val="37000"/>
+                <a:satMod val="300000"/>
+              </a:schemeClr>
+            </a:gs>
+            <a:gs pos="100000">
+              <a:schemeClr val="phClr">
+                <a:tint val="15000"/>
+                <a:satMod val="350000"/>
+              </a:schemeClr>
+            </a:gs>
+          </a:gsLst>
+          <a:lin ang="16200000" scaled="1"/>
+        </a:gradFill>
+        <a:gradFill rotWithShape="1">
+          <a:gsLst>
+            <a:gs pos="0">
+              <a:schemeClr val="phClr">
+                <a:tint val="100000"/>
+                <a:shade val="100000"/>
+                <a:satMod val="130000"/>
+              </a:schemeClr>
+            </a:gs>
+            <a:gs pos="100000">
+              <a:schemeClr val="phClr">
+                <a:tint val="50000"/>
+                <a:shade val="100000"/>
+                <a:satMod val="350000"/>
+              </a:schemeClr>
+            </a:gs>
+          </a:gsLst>
+          <a:lin ang="16200000" scaled="0"/>
+        </a:gradFill>
+      </a:fillStyleLst>
+      <a:lnStyleLst>
+        <a:ln w="9525" cap="flat" cmpd="sng" algn="ctr">
+          <a:solidFill>
+            <a:schemeClr val="phClr">
+              <a:shade val="95000"/>
+              <a:satMod val="105000"/>
+            </a:schemeClr>
+          </a:solidFill>
+          <a:prstDash val="solid"/>
+        </a:ln>
+        <a:ln w="25400" cap="flat" cmpd="sng" algn="ctr">
+          <a:solidFill>
+            <a:schemeClr val="phClr"/>
+          </a:solidFill>
+          <a:prstDash val="solid"/>
+        </a:ln>
+        <a:ln w="38100" cap="flat" cmpd="sng" algn="ctr">
+          <a:solidFill>
+            <a:schemeClr val="phClr"/>
+          </a:solidFill>
+          <a:prstDash val="solid"/>
+        </a:ln>
+      </a:lnStyleLst>
+      <a:effectStyleLst>
+        <a:effectStyle>
+          <a:effectLst>
+            <a:outerShdw blurRad="40000" dist="20000" dir="5400000" rotWithShape="0">
+              <a:srgbClr val="000000">
+                <a:alpha val="38000"/>
+              </a:srgbClr>
+            </a:outerShdw>
+          </a:effectLst>
+        </a:effectStyle>
+        <a:effectStyle>
+          <a:effectLst>
+            <a:outerShdw blurRad="40000" dist="23000" dir="5400000" rotWithShape="0">
+              <a:srgbClr val="000000">
+                <a:alpha val="35000"/>
+              </a:srgbClr>
+            </a:outerShdw>
+          </a:effectLst>
+        </a:effectStyle>
+        <a:effectStyle>
+          <a:effectLst>
+            <a:outerShdw blurRad="40000" dist="23000" dir="5400000" rotWithShape="0">
+              <a:srgbClr val="000000">
+                <a:alpha val="35000"/>
+              </a:srgbClr>
+            </a:outerShdw>
+          </a:effectLst>
+          <a:scene3d>
+            <a:camera prst="orthographicFront">
+              <a:rot lat="0" lon="0" rev="0"/>
+            </a:camera>
+            <a:lightRig rig="threePt" dir="t">
+              <a:rot lat="0" lon="0" rev="1200000"/>
+            </a:lightRig>
+          </a:scene3d>
+          <a:sp3d>
+            <a:bevelT w="63500" h="25400"/>
+          </a:sp3d>
+        </a:effectStyle>
+      </a:effectStyleLst>
+      <a:bgFillStyleLst>
+        <a:solidFill>
+          <a:schemeClr val="phClr"/>
+        </a:solidFill>
+        <a:gradFill rotWithShape="1">
+          <a:gsLst>
+            <a:gs pos="0">
+              <a:schemeClr val="phClr">
+                <a:tint val="40000"/>
+                <a:satMod val="350000"/>
+              </a:schemeClr>
+            </a:gs>
+            <a:gs pos="40000">
+              <a:schemeClr val="phClr">
+                <a:tint val="45000"/>
+                <a:shade val="99000"/>
+                <a:satMod val="350000"/>
+              </a:schemeClr>
+            </a:gs>
+            <a:gs pos="100000">
+              <a:schemeClr val="phClr">
+                <a:shade val="20000"/>
+                <a:satMod val="255000"/>
+              </a:schemeClr>
+            </a:gs>
+          </a:gsLst>
+          <a:path path="circle">
+            <a:fillToRect l="50000" t="-80000" r="50000" b="180000"/>
+          </a:path>
+        </a:gradFill>
+        <a:gradFill rotWithShape="1">
+          <a:gsLst>
+            <a:gs pos="0">
+              <a:schemeClr val="phClr">
+                <a:tint val="80000"/>
+                <a:satMod val="300000"/>
+              </a:schemeClr>
+            </a:gs>
+            <a:gs pos="100000">
+              <a:schemeClr val="phClr">
+                <a:shade val="30000"/>
+                <a:satMod val="200000"/>
+              </a:schemeClr>
+            </a:gs>
+          </a:gsLst>
+          <a:path path="circle">
+            <a:fillToRect l="50000" t="50000" r="50000" b="50000"/>
+          </a:path>
+        </a:gradFill>
+      </a:bgFillStyleLst>
+    </a:fmtScheme>
+  </a:themeElements>
+  <a:objectDefaults>
+    <a:spDef>
+      <a:spPr/>
+      <a:bodyPr/>
+      <a:lstStyle/>
+      <a:style>
+        <a:lnRef idx="1">
+          <a:schemeClr val="accent1"/>
+        </a:lnRef>
+        <a:fillRef idx="3">
+          <a:schemeClr val="accent1"/>
+        </a:fillRef>
+        <a:effectRef idx="2">
+          <a:schemeClr val="accent1"/>
+        </a:effectRef>
+        <a:fontRef idx="minor">
+          <a:schemeClr val="lt1"/>
+        </a:fontRef>
+      </a:style>
+    </a:spDef>
+    <a:lnDef>
+      <a:spPr/>
+      <a:bodyPr/>
+      <a:lstStyle/>
+      <a:style>
+        <a:lnRef idx="2">
+          <a:schemeClr val="accent1"/>
+        </a:lnRef>
+        <a:fillRef idx="0">
+          <a:schemeClr val="accent1"/>
+        </a:fillRef>
+        <a:effectRef idx="1">
+          <a:schemeClr val="accent1"/>
+        </a:effectRef>
+        <a:fontRef idx="minor">
+          <a:schemeClr val="tx1"/>
+        </a:fontRef>
+      </a:style>
+    </a:lnDef>
+  </a:objectDefaults>
+  <a:extraClrSchemeLst/>
+</a:theme>
 </file>